--- a/Andy/figures(中文版)/FinMem_中文架構圖三張.pptx
+++ b/Andy/figures(中文版)/FinMem_中文架構圖三張.pptx
@@ -3185,7 +3185,7 @@
           <a:solidFill>
             <a:srgbClr val="FFFFFF"/>
           </a:solidFill>
-          <a:ln w="12700">
+          <a:ln w="25400">
             <a:solidFill>
               <a:srgbClr val="404040"/>
             </a:solidFill>
@@ -4350,7 +4350,7 @@
           <a:solidFill>
             <a:srgbClr val="FFFFFF"/>
           </a:solidFill>
-          <a:ln w="12700">
+          <a:ln w="25400">
             <a:solidFill>
               <a:srgbClr val="404040"/>
             </a:solidFill>
@@ -4428,7 +4428,7 @@
         <p:spPr>
           <a:xfrm>
             <a:off x="4160520" y="502920"/>
-            <a:ext cx="7589520" cy="320040"/>
+            <a:ext cx="1280160" cy="320040"/>
           </a:xfrm>
           <a:prstGeom prst="rect">
             <a:avLst/>
@@ -4453,8 +4453,170 @@
                 </a:solidFill>
                 <a:latin typeface="Microsoft JhengHei"/>
               </a:rPr>
-              <a:t>LLMs　　</a:t>
-            </a:r>
+              <a:t>LLMs</a:t>
+            </a:r>
+          </a:p>
+        </p:txBody>
+      </p:sp>
+      <p:sp>
+        <p:nvSpPr>
+          <p:cNvPr id="36" name="Oval 35"/>
+          <p:cNvSpPr/>
+          <p:nvPr/>
+        </p:nvSpPr>
+        <p:spPr>
+          <a:xfrm>
+            <a:off x="4937759" y="530352"/>
+            <a:ext cx="201168" cy="201168"/>
+          </a:xfrm>
+          <a:prstGeom prst="ellipse">
+            <a:avLst/>
+          </a:prstGeom>
+          <a:solidFill>
+            <a:srgbClr val="6090C0"/>
+          </a:solidFill>
+          <a:ln>
+            <a:noFill/>
+          </a:ln>
+          <a:effectLst/>
+        </p:spPr>
+        <p:style>
+          <a:lnRef idx="1">
+            <a:schemeClr val="accent1"/>
+          </a:lnRef>
+          <a:fillRef idx="3">
+            <a:schemeClr val="accent1"/>
+          </a:fillRef>
+          <a:effectRef idx="2">
+            <a:schemeClr val="accent1"/>
+          </a:effectRef>
+          <a:fontRef idx="minor">
+            <a:schemeClr val="lt1"/>
+          </a:fontRef>
+        </p:style>
+        <p:txBody>
+          <a:bodyPr rtlCol="0" anchor="ctr"/>
+          <a:lstStyle/>
+          <a:p>
+            <a:pPr algn="ctr"/>
+          </a:p>
+        </p:txBody>
+      </p:sp>
+      <p:sp>
+        <p:nvSpPr>
+          <p:cNvPr id="37" name="Oval 36"/>
+          <p:cNvSpPr/>
+          <p:nvPr/>
+        </p:nvSpPr>
+        <p:spPr>
+          <a:xfrm>
+            <a:off x="5212079" y="530352"/>
+            <a:ext cx="201168" cy="201168"/>
+          </a:xfrm>
+          <a:prstGeom prst="ellipse">
+            <a:avLst/>
+          </a:prstGeom>
+          <a:solidFill>
+            <a:srgbClr val="60A070"/>
+          </a:solidFill>
+          <a:ln>
+            <a:noFill/>
+          </a:ln>
+          <a:effectLst/>
+        </p:spPr>
+        <p:style>
+          <a:lnRef idx="1">
+            <a:schemeClr val="accent1"/>
+          </a:lnRef>
+          <a:fillRef idx="3">
+            <a:schemeClr val="accent1"/>
+          </a:fillRef>
+          <a:effectRef idx="2">
+            <a:schemeClr val="accent1"/>
+          </a:effectRef>
+          <a:fontRef idx="minor">
+            <a:schemeClr val="lt1"/>
+          </a:fontRef>
+        </p:style>
+        <p:txBody>
+          <a:bodyPr rtlCol="0" anchor="ctr"/>
+          <a:lstStyle/>
+          <a:p>
+            <a:pPr algn="ctr"/>
+          </a:p>
+        </p:txBody>
+      </p:sp>
+      <p:sp>
+        <p:nvSpPr>
+          <p:cNvPr id="38" name="Oval 37"/>
+          <p:cNvSpPr/>
+          <p:nvPr/>
+        </p:nvSpPr>
+        <p:spPr>
+          <a:xfrm>
+            <a:off x="5486399" y="530352"/>
+            <a:ext cx="201168" cy="201168"/>
+          </a:xfrm>
+          <a:prstGeom prst="ellipse">
+            <a:avLst/>
+          </a:prstGeom>
+          <a:solidFill>
+            <a:srgbClr val="C09050"/>
+          </a:solidFill>
+          <a:ln>
+            <a:noFill/>
+          </a:ln>
+          <a:effectLst/>
+        </p:spPr>
+        <p:style>
+          <a:lnRef idx="1">
+            <a:schemeClr val="accent1"/>
+          </a:lnRef>
+          <a:fillRef idx="3">
+            <a:schemeClr val="accent1"/>
+          </a:fillRef>
+          <a:effectRef idx="2">
+            <a:schemeClr val="accent1"/>
+          </a:effectRef>
+          <a:fontRef idx="minor">
+            <a:schemeClr val="lt1"/>
+          </a:fontRef>
+        </p:style>
+        <p:txBody>
+          <a:bodyPr rtlCol="0" anchor="ctr"/>
+          <a:lstStyle/>
+          <a:p>
+            <a:pPr algn="ctr"/>
+          </a:p>
+        </p:txBody>
+      </p:sp>
+      <p:sp>
+        <p:nvSpPr>
+          <p:cNvPr id="39" name="TextBox 38"/>
+          <p:cNvSpPr txBox="1"/>
+          <p:nvPr/>
+        </p:nvSpPr>
+        <p:spPr>
+          <a:xfrm>
+            <a:off x="5943600" y="502920"/>
+            <a:ext cx="5806440" cy="320040"/>
+          </a:xfrm>
+          <a:prstGeom prst="rect">
+            <a:avLst/>
+          </a:prstGeom>
+          <a:noFill/>
+        </p:spPr>
+        <p:txBody>
+          <a:bodyPr wrap="square" anchor="t" lIns="0" rIns="0" tIns="0" bIns="0">
+            <a:spAutoFit/>
+          </a:bodyPr>
+          <a:lstStyle/>
+          <a:p>
+            <a:pPr algn="l">
+              <a:lnSpc>
+                <a:spcPct val="100000"/>
+              </a:lnSpc>
+            </a:pPr>
             <a:r>
               <a:rPr sz="1200" b="1">
                 <a:solidFill>
@@ -4514,7 +4676,7 @@
       </p:sp>
       <p:sp>
         <p:nvSpPr>
-          <p:cNvPr id="36" name="Rounded Rectangle 35"/>
+          <p:cNvPr id="40" name="Rounded Rectangle 39"/>
           <p:cNvSpPr/>
           <p:nvPr/>
         </p:nvSpPr>
@@ -4560,7 +4722,7 @@
       </p:sp>
       <p:sp>
         <p:nvSpPr>
-          <p:cNvPr id="37" name="TextBox 36"/>
+          <p:cNvPr id="41" name="TextBox 40"/>
           <p:cNvSpPr txBox="1"/>
           <p:nvPr/>
         </p:nvSpPr>
@@ -4683,7 +4845,7 @@
       </p:sp>
       <p:sp>
         <p:nvSpPr>
-          <p:cNvPr id="38" name="Rounded Rectangle 37"/>
+          <p:cNvPr id="42" name="Rounded Rectangle 41"/>
           <p:cNvSpPr/>
           <p:nvPr/>
         </p:nvSpPr>
@@ -4729,7 +4891,7 @@
       </p:sp>
       <p:sp>
         <p:nvSpPr>
-          <p:cNvPr id="39" name="TextBox 38"/>
+          <p:cNvPr id="43" name="TextBox 42"/>
           <p:cNvSpPr txBox="1"/>
           <p:nvPr/>
         </p:nvSpPr>
@@ -4868,7 +5030,7 @@
       </p:sp>
       <p:sp>
         <p:nvSpPr>
-          <p:cNvPr id="40" name="Rounded Rectangle 39"/>
+          <p:cNvPr id="44" name="Rounded Rectangle 43"/>
           <p:cNvSpPr/>
           <p:nvPr/>
         </p:nvSpPr>
@@ -4914,7 +5076,7 @@
       </p:sp>
       <p:sp>
         <p:nvSpPr>
-          <p:cNvPr id="41" name="TextBox 40"/>
+          <p:cNvPr id="45" name="TextBox 44"/>
           <p:cNvSpPr txBox="1"/>
           <p:nvPr/>
         </p:nvSpPr>
@@ -5076,7 +5238,7 @@
       </p:sp>
       <p:sp>
         <p:nvSpPr>
-          <p:cNvPr id="42" name="Rounded Rectangle 41"/>
+          <p:cNvPr id="46" name="Rounded Rectangle 45"/>
           <p:cNvSpPr/>
           <p:nvPr/>
         </p:nvSpPr>
@@ -5122,7 +5284,7 @@
       </p:sp>
       <p:sp>
         <p:nvSpPr>
-          <p:cNvPr id="43" name="TextBox 42"/>
+          <p:cNvPr id="47" name="TextBox 46"/>
           <p:cNvSpPr txBox="1"/>
           <p:nvPr/>
         </p:nvSpPr>
@@ -5705,10 +5867,389 @@
           </a:fontRef>
         </p:style>
         <p:txBody>
-          <a:bodyPr rtlCol="0" anchor="ctr" wrap="square" lIns="30000" rIns="30000"/>
+          <a:bodyPr rtlCol="0" anchor="ctr"/>
           <a:lstStyle/>
           <a:p>
             <a:pPr algn="ctr"/>
+          </a:p>
+        </p:txBody>
+      </p:sp>
+      <p:sp>
+        <p:nvSpPr>
+          <p:cNvPr id="15" name="Rectangle 14"/>
+          <p:cNvSpPr/>
+          <p:nvPr/>
+        </p:nvSpPr>
+        <p:spPr>
+          <a:xfrm>
+            <a:off x="621792" y="626364"/>
+            <a:ext cx="457200" cy="530352"/>
+          </a:xfrm>
+          <a:prstGeom prst="rect">
+            <a:avLst/>
+          </a:prstGeom>
+          <a:solidFill>
+            <a:srgbClr val="FFFFFF"/>
+          </a:solidFill>
+          <a:ln w="13970">
+            <a:solidFill>
+              <a:srgbClr val="707070"/>
+            </a:solidFill>
+          </a:ln>
+          <a:effectLst/>
+        </p:spPr>
+        <p:style>
+          <a:lnRef idx="1">
+            <a:schemeClr val="accent1"/>
+          </a:lnRef>
+          <a:fillRef idx="3">
+            <a:schemeClr val="accent1"/>
+          </a:fillRef>
+          <a:effectRef idx="2">
+            <a:schemeClr val="accent1"/>
+          </a:effectRef>
+          <a:fontRef idx="minor">
+            <a:schemeClr val="lt1"/>
+          </a:fontRef>
+        </p:style>
+        <p:txBody>
+          <a:bodyPr rtlCol="0" anchor="ctr"/>
+          <a:lstStyle/>
+          <a:p>
+            <a:pPr algn="ctr"/>
+          </a:p>
+        </p:txBody>
+      </p:sp>
+      <p:sp>
+        <p:nvSpPr>
+          <p:cNvPr id="16" name="Rectangle 15"/>
+          <p:cNvSpPr/>
+          <p:nvPr/>
+        </p:nvSpPr>
+        <p:spPr>
+          <a:xfrm>
+            <a:off x="690371" y="711220"/>
+            <a:ext cx="320040" cy="37124"/>
+          </a:xfrm>
+          <a:prstGeom prst="rect">
+            <a:avLst/>
+          </a:prstGeom>
+          <a:solidFill>
+            <a:srgbClr val="B8B8B8"/>
+          </a:solidFill>
+          <a:ln>
+            <a:noFill/>
+          </a:ln>
+          <a:effectLst/>
+        </p:spPr>
+        <p:style>
+          <a:lnRef idx="1">
+            <a:schemeClr val="accent1"/>
+          </a:lnRef>
+          <a:fillRef idx="3">
+            <a:schemeClr val="accent1"/>
+          </a:fillRef>
+          <a:effectRef idx="2">
+            <a:schemeClr val="accent1"/>
+          </a:effectRef>
+          <a:fontRef idx="minor">
+            <a:schemeClr val="lt1"/>
+          </a:fontRef>
+        </p:style>
+        <p:txBody>
+          <a:bodyPr rtlCol="0" anchor="ctr"/>
+          <a:lstStyle/>
+          <a:p>
+            <a:pPr algn="ctr"/>
+          </a:p>
+        </p:txBody>
+      </p:sp>
+      <p:sp>
+        <p:nvSpPr>
+          <p:cNvPr id="17" name="Rectangle 16"/>
+          <p:cNvSpPr/>
+          <p:nvPr/>
+        </p:nvSpPr>
+        <p:spPr>
+          <a:xfrm>
+            <a:off x="690371" y="785469"/>
+            <a:ext cx="320040" cy="37124"/>
+          </a:xfrm>
+          <a:prstGeom prst="rect">
+            <a:avLst/>
+          </a:prstGeom>
+          <a:solidFill>
+            <a:srgbClr val="B8B8B8"/>
+          </a:solidFill>
+          <a:ln>
+            <a:noFill/>
+          </a:ln>
+          <a:effectLst/>
+        </p:spPr>
+        <p:style>
+          <a:lnRef idx="1">
+            <a:schemeClr val="accent1"/>
+          </a:lnRef>
+          <a:fillRef idx="3">
+            <a:schemeClr val="accent1"/>
+          </a:fillRef>
+          <a:effectRef idx="2">
+            <a:schemeClr val="accent1"/>
+          </a:effectRef>
+          <a:fontRef idx="minor">
+            <a:schemeClr val="lt1"/>
+          </a:fontRef>
+        </p:style>
+        <p:txBody>
+          <a:bodyPr rtlCol="0" anchor="ctr"/>
+          <a:lstStyle/>
+          <a:p>
+            <a:pPr algn="ctr"/>
+          </a:p>
+        </p:txBody>
+      </p:sp>
+      <p:sp>
+        <p:nvSpPr>
+          <p:cNvPr id="18" name="Rectangle 17"/>
+          <p:cNvSpPr/>
+          <p:nvPr/>
+        </p:nvSpPr>
+        <p:spPr>
+          <a:xfrm>
+            <a:off x="694943" y="997610"/>
+            <a:ext cx="68580" cy="84856"/>
+          </a:xfrm>
+          <a:prstGeom prst="rect">
+            <a:avLst/>
+          </a:prstGeom>
+          <a:solidFill>
+            <a:srgbClr val="5A8BBF"/>
+          </a:solidFill>
+          <a:ln>
+            <a:noFill/>
+          </a:ln>
+          <a:effectLst/>
+        </p:spPr>
+        <p:style>
+          <a:lnRef idx="1">
+            <a:schemeClr val="accent1"/>
+          </a:lnRef>
+          <a:fillRef idx="3">
+            <a:schemeClr val="accent1"/>
+          </a:fillRef>
+          <a:effectRef idx="2">
+            <a:schemeClr val="accent1"/>
+          </a:effectRef>
+          <a:fontRef idx="minor">
+            <a:schemeClr val="lt1"/>
+          </a:fontRef>
+        </p:style>
+        <p:txBody>
+          <a:bodyPr rtlCol="0" anchor="ctr"/>
+          <a:lstStyle/>
+          <a:p>
+            <a:pPr algn="ctr"/>
+          </a:p>
+        </p:txBody>
+      </p:sp>
+      <p:sp>
+        <p:nvSpPr>
+          <p:cNvPr id="19" name="Rectangle 18"/>
+          <p:cNvSpPr/>
+          <p:nvPr/>
+        </p:nvSpPr>
+        <p:spPr>
+          <a:xfrm>
+            <a:off x="788669" y="933968"/>
+            <a:ext cx="68580" cy="148498"/>
+          </a:xfrm>
+          <a:prstGeom prst="rect">
+            <a:avLst/>
+          </a:prstGeom>
+          <a:solidFill>
+            <a:srgbClr val="5A8BBF"/>
+          </a:solidFill>
+          <a:ln>
+            <a:noFill/>
+          </a:ln>
+          <a:effectLst/>
+        </p:spPr>
+        <p:style>
+          <a:lnRef idx="1">
+            <a:schemeClr val="accent1"/>
+          </a:lnRef>
+          <a:fillRef idx="3">
+            <a:schemeClr val="accent1"/>
+          </a:fillRef>
+          <a:effectRef idx="2">
+            <a:schemeClr val="accent1"/>
+          </a:effectRef>
+          <a:fontRef idx="minor">
+            <a:schemeClr val="lt1"/>
+          </a:fontRef>
+        </p:style>
+        <p:txBody>
+          <a:bodyPr rtlCol="0" anchor="ctr"/>
+          <a:lstStyle/>
+          <a:p>
+            <a:pPr algn="ctr"/>
+          </a:p>
+        </p:txBody>
+      </p:sp>
+      <p:sp>
+        <p:nvSpPr>
+          <p:cNvPr id="20" name="Rectangle 19"/>
+          <p:cNvSpPr/>
+          <p:nvPr/>
+        </p:nvSpPr>
+        <p:spPr>
+          <a:xfrm>
+            <a:off x="882396" y="870325"/>
+            <a:ext cx="68580" cy="212140"/>
+          </a:xfrm>
+          <a:prstGeom prst="rect">
+            <a:avLst/>
+          </a:prstGeom>
+          <a:solidFill>
+            <a:srgbClr val="5A8BBF"/>
+          </a:solidFill>
+          <a:ln>
+            <a:noFill/>
+          </a:ln>
+          <a:effectLst/>
+        </p:spPr>
+        <p:style>
+          <a:lnRef idx="1">
+            <a:schemeClr val="accent1"/>
+          </a:lnRef>
+          <a:fillRef idx="3">
+            <a:schemeClr val="accent1"/>
+          </a:fillRef>
+          <a:effectRef idx="2">
+            <a:schemeClr val="accent1"/>
+          </a:effectRef>
+          <a:fontRef idx="minor">
+            <a:schemeClr val="lt1"/>
+          </a:fontRef>
+        </p:style>
+        <p:txBody>
+          <a:bodyPr rtlCol="0" anchor="ctr"/>
+          <a:lstStyle/>
+          <a:p>
+            <a:pPr algn="ctr"/>
+          </a:p>
+        </p:txBody>
+      </p:sp>
+      <p:sp>
+        <p:nvSpPr>
+          <p:cNvPr id="21" name="Rectangle 20"/>
+          <p:cNvSpPr/>
+          <p:nvPr/>
+        </p:nvSpPr>
+        <p:spPr>
+          <a:xfrm>
+            <a:off x="594359" y="594808"/>
+            <a:ext cx="274320" cy="90159"/>
+          </a:xfrm>
+          <a:prstGeom prst="rect">
+            <a:avLst/>
+          </a:prstGeom>
+          <a:solidFill>
+            <a:srgbClr val="C03030"/>
+          </a:solidFill>
+          <a:ln>
+            <a:noFill/>
+          </a:ln>
+          <a:effectLst/>
+        </p:spPr>
+        <p:style>
+          <a:lnRef idx="1">
+            <a:schemeClr val="accent1"/>
+          </a:lnRef>
+          <a:fillRef idx="3">
+            <a:schemeClr val="accent1"/>
+          </a:fillRef>
+          <a:effectRef idx="2">
+            <a:schemeClr val="accent1"/>
+          </a:effectRef>
+          <a:fontRef idx="minor">
+            <a:schemeClr val="lt1"/>
+          </a:fontRef>
+        </p:style>
+        <p:txBody>
+          <a:bodyPr rtlCol="0" anchor="ctr"/>
+          <a:lstStyle/>
+          <a:p>
+            <a:pPr algn="ctr"/>
+          </a:p>
+        </p:txBody>
+      </p:sp>
+      <p:sp>
+        <p:nvSpPr>
+          <p:cNvPr id="22" name="TextBox 21"/>
+          <p:cNvSpPr txBox="1"/>
+          <p:nvPr/>
+        </p:nvSpPr>
+        <p:spPr>
+          <a:xfrm>
+            <a:off x="594359" y="594808"/>
+            <a:ext cx="274320" cy="90159"/>
+          </a:xfrm>
+          <a:prstGeom prst="rect">
+            <a:avLst/>
+          </a:prstGeom>
+          <a:noFill/>
+        </p:spPr>
+        <p:txBody>
+          <a:bodyPr wrap="square" anchor="ctr" lIns="0" rIns="0" tIns="0" bIns="0">
+            <a:spAutoFit/>
+          </a:bodyPr>
+          <a:lstStyle/>
+          <a:p>
+            <a:pPr algn="ctr">
+              <a:lnSpc>
+                <a:spcPct val="100000"/>
+              </a:lnSpc>
+            </a:pPr>
+            <a:r>
+              <a:rPr sz="650" b="1">
+                <a:solidFill>
+                  <a:srgbClr val="FFFFFF"/>
+                </a:solidFill>
+                <a:latin typeface="Microsoft JhengHei"/>
+              </a:rPr>
+              <a:t>NEWS</a:t>
+            </a:r>
+          </a:p>
+        </p:txBody>
+      </p:sp>
+      <p:sp>
+        <p:nvSpPr>
+          <p:cNvPr id="23" name="TextBox 22"/>
+          <p:cNvSpPr txBox="1"/>
+          <p:nvPr/>
+        </p:nvSpPr>
+        <p:spPr>
+          <a:xfrm>
+            <a:off x="1243584" y="548640"/>
+            <a:ext cx="1271016" cy="685800"/>
+          </a:xfrm>
+          <a:prstGeom prst="rect">
+            <a:avLst/>
+          </a:prstGeom>
+          <a:noFill/>
+        </p:spPr>
+        <p:txBody>
+          <a:bodyPr wrap="square" anchor="ctr" lIns="0" rIns="0" tIns="0" bIns="0">
+            <a:spAutoFit/>
+          </a:bodyPr>
+          <a:lstStyle/>
+          <a:p>
+            <a:pPr algn="l">
+              <a:lnSpc>
+                <a:spcPct val="105000"/>
+              </a:lnSpc>
+            </a:pPr>
             <a:r>
               <a:rPr sz="950" b="1">
                 <a:solidFill>
@@ -5723,7 +6264,7 @@
       </p:sp>
       <p:sp>
         <p:nvSpPr>
-          <p:cNvPr id="15" name="Rounded Rectangle 14"/>
+          <p:cNvPr id="24" name="Rounded Rectangle 23"/>
           <p:cNvSpPr/>
           <p:nvPr/>
         </p:nvSpPr>
@@ -5760,10 +6301,306 @@
           </a:fontRef>
         </p:style>
         <p:txBody>
-          <a:bodyPr rtlCol="0" anchor="ctr" wrap="square" lIns="30000" rIns="30000"/>
+          <a:bodyPr rtlCol="0" anchor="ctr"/>
           <a:lstStyle/>
           <a:p>
             <a:pPr algn="ctr"/>
+          </a:p>
+        </p:txBody>
+      </p:sp>
+      <p:sp>
+        <p:nvSpPr>
+          <p:cNvPr id="25" name="Rectangle 24"/>
+          <p:cNvSpPr/>
+          <p:nvPr/>
+        </p:nvSpPr>
+        <p:spPr>
+          <a:xfrm>
+            <a:off x="2953512" y="626364"/>
+            <a:ext cx="457200" cy="530352"/>
+          </a:xfrm>
+          <a:prstGeom prst="rect">
+            <a:avLst/>
+          </a:prstGeom>
+          <a:solidFill>
+            <a:srgbClr val="FFFFFF"/>
+          </a:solidFill>
+          <a:ln w="13970">
+            <a:solidFill>
+              <a:srgbClr val="707070"/>
+            </a:solidFill>
+          </a:ln>
+          <a:effectLst/>
+        </p:spPr>
+        <p:style>
+          <a:lnRef idx="1">
+            <a:schemeClr val="accent1"/>
+          </a:lnRef>
+          <a:fillRef idx="3">
+            <a:schemeClr val="accent1"/>
+          </a:fillRef>
+          <a:effectRef idx="2">
+            <a:schemeClr val="accent1"/>
+          </a:effectRef>
+          <a:fontRef idx="minor">
+            <a:schemeClr val="lt1"/>
+          </a:fontRef>
+        </p:style>
+        <p:txBody>
+          <a:bodyPr rtlCol="0" anchor="ctr"/>
+          <a:lstStyle/>
+          <a:p>
+            <a:pPr algn="ctr"/>
+          </a:p>
+        </p:txBody>
+      </p:sp>
+      <p:sp>
+        <p:nvSpPr>
+          <p:cNvPr id="26" name="Rectangle 25"/>
+          <p:cNvSpPr/>
+          <p:nvPr/>
+        </p:nvSpPr>
+        <p:spPr>
+          <a:xfrm>
+            <a:off x="3022092" y="711220"/>
+            <a:ext cx="320040" cy="37124"/>
+          </a:xfrm>
+          <a:prstGeom prst="rect">
+            <a:avLst/>
+          </a:prstGeom>
+          <a:solidFill>
+            <a:srgbClr val="B8B8B8"/>
+          </a:solidFill>
+          <a:ln>
+            <a:noFill/>
+          </a:ln>
+          <a:effectLst/>
+        </p:spPr>
+        <p:style>
+          <a:lnRef idx="1">
+            <a:schemeClr val="accent1"/>
+          </a:lnRef>
+          <a:fillRef idx="3">
+            <a:schemeClr val="accent1"/>
+          </a:fillRef>
+          <a:effectRef idx="2">
+            <a:schemeClr val="accent1"/>
+          </a:effectRef>
+          <a:fontRef idx="minor">
+            <a:schemeClr val="lt1"/>
+          </a:fontRef>
+        </p:style>
+        <p:txBody>
+          <a:bodyPr rtlCol="0" anchor="ctr"/>
+          <a:lstStyle/>
+          <a:p>
+            <a:pPr algn="ctr"/>
+          </a:p>
+        </p:txBody>
+      </p:sp>
+      <p:sp>
+        <p:nvSpPr>
+          <p:cNvPr id="27" name="Rectangle 26"/>
+          <p:cNvSpPr/>
+          <p:nvPr/>
+        </p:nvSpPr>
+        <p:spPr>
+          <a:xfrm>
+            <a:off x="3022092" y="785469"/>
+            <a:ext cx="320040" cy="37124"/>
+          </a:xfrm>
+          <a:prstGeom prst="rect">
+            <a:avLst/>
+          </a:prstGeom>
+          <a:solidFill>
+            <a:srgbClr val="B8B8B8"/>
+          </a:solidFill>
+          <a:ln>
+            <a:noFill/>
+          </a:ln>
+          <a:effectLst/>
+        </p:spPr>
+        <p:style>
+          <a:lnRef idx="1">
+            <a:schemeClr val="accent1"/>
+          </a:lnRef>
+          <a:fillRef idx="3">
+            <a:schemeClr val="accent1"/>
+          </a:fillRef>
+          <a:effectRef idx="2">
+            <a:schemeClr val="accent1"/>
+          </a:effectRef>
+          <a:fontRef idx="minor">
+            <a:schemeClr val="lt1"/>
+          </a:fontRef>
+        </p:style>
+        <p:txBody>
+          <a:bodyPr rtlCol="0" anchor="ctr"/>
+          <a:lstStyle/>
+          <a:p>
+            <a:pPr algn="ctr"/>
+          </a:p>
+        </p:txBody>
+      </p:sp>
+      <p:sp>
+        <p:nvSpPr>
+          <p:cNvPr id="28" name="Rectangle 27"/>
+          <p:cNvSpPr/>
+          <p:nvPr/>
+        </p:nvSpPr>
+        <p:spPr>
+          <a:xfrm>
+            <a:off x="3026664" y="997610"/>
+            <a:ext cx="68580" cy="84856"/>
+          </a:xfrm>
+          <a:prstGeom prst="rect">
+            <a:avLst/>
+          </a:prstGeom>
+          <a:solidFill>
+            <a:srgbClr val="5A8BBF"/>
+          </a:solidFill>
+          <a:ln>
+            <a:noFill/>
+          </a:ln>
+          <a:effectLst/>
+        </p:spPr>
+        <p:style>
+          <a:lnRef idx="1">
+            <a:schemeClr val="accent1"/>
+          </a:lnRef>
+          <a:fillRef idx="3">
+            <a:schemeClr val="accent1"/>
+          </a:fillRef>
+          <a:effectRef idx="2">
+            <a:schemeClr val="accent1"/>
+          </a:effectRef>
+          <a:fontRef idx="minor">
+            <a:schemeClr val="lt1"/>
+          </a:fontRef>
+        </p:style>
+        <p:txBody>
+          <a:bodyPr rtlCol="0" anchor="ctr"/>
+          <a:lstStyle/>
+          <a:p>
+            <a:pPr algn="ctr"/>
+          </a:p>
+        </p:txBody>
+      </p:sp>
+      <p:sp>
+        <p:nvSpPr>
+          <p:cNvPr id="29" name="Rectangle 28"/>
+          <p:cNvSpPr/>
+          <p:nvPr/>
+        </p:nvSpPr>
+        <p:spPr>
+          <a:xfrm>
+            <a:off x="3120390" y="933968"/>
+            <a:ext cx="68580" cy="148498"/>
+          </a:xfrm>
+          <a:prstGeom prst="rect">
+            <a:avLst/>
+          </a:prstGeom>
+          <a:solidFill>
+            <a:srgbClr val="5A8BBF"/>
+          </a:solidFill>
+          <a:ln>
+            <a:noFill/>
+          </a:ln>
+          <a:effectLst/>
+        </p:spPr>
+        <p:style>
+          <a:lnRef idx="1">
+            <a:schemeClr val="accent1"/>
+          </a:lnRef>
+          <a:fillRef idx="3">
+            <a:schemeClr val="accent1"/>
+          </a:fillRef>
+          <a:effectRef idx="2">
+            <a:schemeClr val="accent1"/>
+          </a:effectRef>
+          <a:fontRef idx="minor">
+            <a:schemeClr val="lt1"/>
+          </a:fontRef>
+        </p:style>
+        <p:txBody>
+          <a:bodyPr rtlCol="0" anchor="ctr"/>
+          <a:lstStyle/>
+          <a:p>
+            <a:pPr algn="ctr"/>
+          </a:p>
+        </p:txBody>
+      </p:sp>
+      <p:sp>
+        <p:nvSpPr>
+          <p:cNvPr id="30" name="Rectangle 29"/>
+          <p:cNvSpPr/>
+          <p:nvPr/>
+        </p:nvSpPr>
+        <p:spPr>
+          <a:xfrm>
+            <a:off x="3214116" y="870325"/>
+            <a:ext cx="68580" cy="212140"/>
+          </a:xfrm>
+          <a:prstGeom prst="rect">
+            <a:avLst/>
+          </a:prstGeom>
+          <a:solidFill>
+            <a:srgbClr val="5A8BBF"/>
+          </a:solidFill>
+          <a:ln>
+            <a:noFill/>
+          </a:ln>
+          <a:effectLst/>
+        </p:spPr>
+        <p:style>
+          <a:lnRef idx="1">
+            <a:schemeClr val="accent1"/>
+          </a:lnRef>
+          <a:fillRef idx="3">
+            <a:schemeClr val="accent1"/>
+          </a:fillRef>
+          <a:effectRef idx="2">
+            <a:schemeClr val="accent1"/>
+          </a:effectRef>
+          <a:fontRef idx="minor">
+            <a:schemeClr val="lt1"/>
+          </a:fontRef>
+        </p:style>
+        <p:txBody>
+          <a:bodyPr rtlCol="0" anchor="ctr"/>
+          <a:lstStyle/>
+          <a:p>
+            <a:pPr algn="ctr"/>
+          </a:p>
+        </p:txBody>
+      </p:sp>
+      <p:sp>
+        <p:nvSpPr>
+          <p:cNvPr id="31" name="TextBox 30"/>
+          <p:cNvSpPr txBox="1"/>
+          <p:nvPr/>
+        </p:nvSpPr>
+        <p:spPr>
+          <a:xfrm>
+            <a:off x="3575304" y="548640"/>
+            <a:ext cx="1271016" cy="685800"/>
+          </a:xfrm>
+          <a:prstGeom prst="rect">
+            <a:avLst/>
+          </a:prstGeom>
+          <a:noFill/>
+        </p:spPr>
+        <p:txBody>
+          <a:bodyPr wrap="square" anchor="ctr" lIns="0" rIns="0" tIns="0" bIns="0">
+            <a:spAutoFit/>
+          </a:bodyPr>
+          <a:lstStyle/>
+          <a:p>
+            <a:pPr algn="l">
+              <a:lnSpc>
+                <a:spcPct val="105000"/>
+              </a:lnSpc>
+            </a:pPr>
             <a:r>
               <a:rPr sz="950" b="1">
                 <a:solidFill>
@@ -5778,7 +6615,7 @@
       </p:sp>
       <p:sp>
         <p:nvSpPr>
-          <p:cNvPr id="16" name="Rounded Rectangle 15"/>
+          <p:cNvPr id="32" name="Rounded Rectangle 31"/>
           <p:cNvSpPr/>
           <p:nvPr/>
         </p:nvSpPr>
@@ -5815,10 +6652,306 @@
           </a:fontRef>
         </p:style>
         <p:txBody>
-          <a:bodyPr rtlCol="0" anchor="ctr" wrap="square" lIns="30000" rIns="30000"/>
+          <a:bodyPr rtlCol="0" anchor="ctr"/>
           <a:lstStyle/>
           <a:p>
             <a:pPr algn="ctr"/>
+          </a:p>
+        </p:txBody>
+      </p:sp>
+      <p:sp>
+        <p:nvSpPr>
+          <p:cNvPr id="33" name="Rectangle 32"/>
+          <p:cNvSpPr/>
+          <p:nvPr/>
+        </p:nvSpPr>
+        <p:spPr>
+          <a:xfrm>
+            <a:off x="5285231" y="626364"/>
+            <a:ext cx="457200" cy="530352"/>
+          </a:xfrm>
+          <a:prstGeom prst="rect">
+            <a:avLst/>
+          </a:prstGeom>
+          <a:solidFill>
+            <a:srgbClr val="FFFFFF"/>
+          </a:solidFill>
+          <a:ln w="13970">
+            <a:solidFill>
+              <a:srgbClr val="707070"/>
+            </a:solidFill>
+          </a:ln>
+          <a:effectLst/>
+        </p:spPr>
+        <p:style>
+          <a:lnRef idx="1">
+            <a:schemeClr val="accent1"/>
+          </a:lnRef>
+          <a:fillRef idx="3">
+            <a:schemeClr val="accent1"/>
+          </a:fillRef>
+          <a:effectRef idx="2">
+            <a:schemeClr val="accent1"/>
+          </a:effectRef>
+          <a:fontRef idx="minor">
+            <a:schemeClr val="lt1"/>
+          </a:fontRef>
+        </p:style>
+        <p:txBody>
+          <a:bodyPr rtlCol="0" anchor="ctr"/>
+          <a:lstStyle/>
+          <a:p>
+            <a:pPr algn="ctr"/>
+          </a:p>
+        </p:txBody>
+      </p:sp>
+      <p:sp>
+        <p:nvSpPr>
+          <p:cNvPr id="34" name="Rectangle 33"/>
+          <p:cNvSpPr/>
+          <p:nvPr/>
+        </p:nvSpPr>
+        <p:spPr>
+          <a:xfrm>
+            <a:off x="5353812" y="711220"/>
+            <a:ext cx="320040" cy="37124"/>
+          </a:xfrm>
+          <a:prstGeom prst="rect">
+            <a:avLst/>
+          </a:prstGeom>
+          <a:solidFill>
+            <a:srgbClr val="B8B8B8"/>
+          </a:solidFill>
+          <a:ln>
+            <a:noFill/>
+          </a:ln>
+          <a:effectLst/>
+        </p:spPr>
+        <p:style>
+          <a:lnRef idx="1">
+            <a:schemeClr val="accent1"/>
+          </a:lnRef>
+          <a:fillRef idx="3">
+            <a:schemeClr val="accent1"/>
+          </a:fillRef>
+          <a:effectRef idx="2">
+            <a:schemeClr val="accent1"/>
+          </a:effectRef>
+          <a:fontRef idx="minor">
+            <a:schemeClr val="lt1"/>
+          </a:fontRef>
+        </p:style>
+        <p:txBody>
+          <a:bodyPr rtlCol="0" anchor="ctr"/>
+          <a:lstStyle/>
+          <a:p>
+            <a:pPr algn="ctr"/>
+          </a:p>
+        </p:txBody>
+      </p:sp>
+      <p:sp>
+        <p:nvSpPr>
+          <p:cNvPr id="35" name="Rectangle 34"/>
+          <p:cNvSpPr/>
+          <p:nvPr/>
+        </p:nvSpPr>
+        <p:spPr>
+          <a:xfrm>
+            <a:off x="5353812" y="785469"/>
+            <a:ext cx="320040" cy="37124"/>
+          </a:xfrm>
+          <a:prstGeom prst="rect">
+            <a:avLst/>
+          </a:prstGeom>
+          <a:solidFill>
+            <a:srgbClr val="B8B8B8"/>
+          </a:solidFill>
+          <a:ln>
+            <a:noFill/>
+          </a:ln>
+          <a:effectLst/>
+        </p:spPr>
+        <p:style>
+          <a:lnRef idx="1">
+            <a:schemeClr val="accent1"/>
+          </a:lnRef>
+          <a:fillRef idx="3">
+            <a:schemeClr val="accent1"/>
+          </a:fillRef>
+          <a:effectRef idx="2">
+            <a:schemeClr val="accent1"/>
+          </a:effectRef>
+          <a:fontRef idx="minor">
+            <a:schemeClr val="lt1"/>
+          </a:fontRef>
+        </p:style>
+        <p:txBody>
+          <a:bodyPr rtlCol="0" anchor="ctr"/>
+          <a:lstStyle/>
+          <a:p>
+            <a:pPr algn="ctr"/>
+          </a:p>
+        </p:txBody>
+      </p:sp>
+      <p:sp>
+        <p:nvSpPr>
+          <p:cNvPr id="36" name="Rectangle 35"/>
+          <p:cNvSpPr/>
+          <p:nvPr/>
+        </p:nvSpPr>
+        <p:spPr>
+          <a:xfrm>
+            <a:off x="5358383" y="997610"/>
+            <a:ext cx="68580" cy="84856"/>
+          </a:xfrm>
+          <a:prstGeom prst="rect">
+            <a:avLst/>
+          </a:prstGeom>
+          <a:solidFill>
+            <a:srgbClr val="5A8BBF"/>
+          </a:solidFill>
+          <a:ln>
+            <a:noFill/>
+          </a:ln>
+          <a:effectLst/>
+        </p:spPr>
+        <p:style>
+          <a:lnRef idx="1">
+            <a:schemeClr val="accent1"/>
+          </a:lnRef>
+          <a:fillRef idx="3">
+            <a:schemeClr val="accent1"/>
+          </a:fillRef>
+          <a:effectRef idx="2">
+            <a:schemeClr val="accent1"/>
+          </a:effectRef>
+          <a:fontRef idx="minor">
+            <a:schemeClr val="lt1"/>
+          </a:fontRef>
+        </p:style>
+        <p:txBody>
+          <a:bodyPr rtlCol="0" anchor="ctr"/>
+          <a:lstStyle/>
+          <a:p>
+            <a:pPr algn="ctr"/>
+          </a:p>
+        </p:txBody>
+      </p:sp>
+      <p:sp>
+        <p:nvSpPr>
+          <p:cNvPr id="37" name="Rectangle 36"/>
+          <p:cNvSpPr/>
+          <p:nvPr/>
+        </p:nvSpPr>
+        <p:spPr>
+          <a:xfrm>
+            <a:off x="5452109" y="933968"/>
+            <a:ext cx="68580" cy="148498"/>
+          </a:xfrm>
+          <a:prstGeom prst="rect">
+            <a:avLst/>
+          </a:prstGeom>
+          <a:solidFill>
+            <a:srgbClr val="5A8BBF"/>
+          </a:solidFill>
+          <a:ln>
+            <a:noFill/>
+          </a:ln>
+          <a:effectLst/>
+        </p:spPr>
+        <p:style>
+          <a:lnRef idx="1">
+            <a:schemeClr val="accent1"/>
+          </a:lnRef>
+          <a:fillRef idx="3">
+            <a:schemeClr val="accent1"/>
+          </a:fillRef>
+          <a:effectRef idx="2">
+            <a:schemeClr val="accent1"/>
+          </a:effectRef>
+          <a:fontRef idx="minor">
+            <a:schemeClr val="lt1"/>
+          </a:fontRef>
+        </p:style>
+        <p:txBody>
+          <a:bodyPr rtlCol="0" anchor="ctr"/>
+          <a:lstStyle/>
+          <a:p>
+            <a:pPr algn="ctr"/>
+          </a:p>
+        </p:txBody>
+      </p:sp>
+      <p:sp>
+        <p:nvSpPr>
+          <p:cNvPr id="38" name="Rectangle 37"/>
+          <p:cNvSpPr/>
+          <p:nvPr/>
+        </p:nvSpPr>
+        <p:spPr>
+          <a:xfrm>
+            <a:off x="5545836" y="870325"/>
+            <a:ext cx="68580" cy="212140"/>
+          </a:xfrm>
+          <a:prstGeom prst="rect">
+            <a:avLst/>
+          </a:prstGeom>
+          <a:solidFill>
+            <a:srgbClr val="5A8BBF"/>
+          </a:solidFill>
+          <a:ln>
+            <a:noFill/>
+          </a:ln>
+          <a:effectLst/>
+        </p:spPr>
+        <p:style>
+          <a:lnRef idx="1">
+            <a:schemeClr val="accent1"/>
+          </a:lnRef>
+          <a:fillRef idx="3">
+            <a:schemeClr val="accent1"/>
+          </a:fillRef>
+          <a:effectRef idx="2">
+            <a:schemeClr val="accent1"/>
+          </a:effectRef>
+          <a:fontRef idx="minor">
+            <a:schemeClr val="lt1"/>
+          </a:fontRef>
+        </p:style>
+        <p:txBody>
+          <a:bodyPr rtlCol="0" anchor="ctr"/>
+          <a:lstStyle/>
+          <a:p>
+            <a:pPr algn="ctr"/>
+          </a:p>
+        </p:txBody>
+      </p:sp>
+      <p:sp>
+        <p:nvSpPr>
+          <p:cNvPr id="39" name="TextBox 38"/>
+          <p:cNvSpPr txBox="1"/>
+          <p:nvPr/>
+        </p:nvSpPr>
+        <p:spPr>
+          <a:xfrm>
+            <a:off x="5907023" y="548640"/>
+            <a:ext cx="1271016" cy="685800"/>
+          </a:xfrm>
+          <a:prstGeom prst="rect">
+            <a:avLst/>
+          </a:prstGeom>
+          <a:noFill/>
+        </p:spPr>
+        <p:txBody>
+          <a:bodyPr wrap="square" anchor="ctr" lIns="0" rIns="0" tIns="0" bIns="0">
+            <a:spAutoFit/>
+          </a:bodyPr>
+          <a:lstStyle/>
+          <a:p>
+            <a:pPr algn="l">
+              <a:lnSpc>
+                <a:spcPct val="105000"/>
+              </a:lnSpc>
+            </a:pPr>
             <a:r>
               <a:rPr sz="950" b="1">
                 <a:solidFill>
@@ -5830,7 +6963,11 @@
             </a:r>
           </a:p>
           <a:p>
-            <a:pPr algn="ctr"/>
+            <a:pPr algn="l">
+              <a:lnSpc>
+                <a:spcPct val="105000"/>
+              </a:lnSpc>
+            </a:pPr>
             <a:r>
               <a:rPr sz="950" b="1">
                 <a:solidFill>
@@ -5845,7 +6982,7 @@
       </p:sp>
       <p:sp>
         <p:nvSpPr>
-          <p:cNvPr id="17" name="Rounded Rectangle 16"/>
+          <p:cNvPr id="40" name="Rounded Rectangle 39"/>
           <p:cNvSpPr/>
           <p:nvPr/>
         </p:nvSpPr>
@@ -5882,10 +7019,236 @@
           </a:fontRef>
         </p:style>
         <p:txBody>
-          <a:bodyPr rtlCol="0" anchor="ctr" wrap="square" lIns="30000" rIns="30000"/>
+          <a:bodyPr rtlCol="0" anchor="ctr"/>
           <a:lstStyle/>
           <a:p>
             <a:pPr algn="ctr"/>
+          </a:p>
+        </p:txBody>
+      </p:sp>
+      <p:sp>
+        <p:nvSpPr>
+          <p:cNvPr id="41" name="Rectangle 40"/>
+          <p:cNvSpPr/>
+          <p:nvPr/>
+        </p:nvSpPr>
+        <p:spPr>
+          <a:xfrm>
+            <a:off x="7616951" y="626364"/>
+            <a:ext cx="457200" cy="530352"/>
+          </a:xfrm>
+          <a:prstGeom prst="rect">
+            <a:avLst/>
+          </a:prstGeom>
+          <a:solidFill>
+            <a:srgbClr val="FFFFFF"/>
+          </a:solidFill>
+          <a:ln w="13970">
+            <a:solidFill>
+              <a:srgbClr val="707070"/>
+            </a:solidFill>
+          </a:ln>
+          <a:effectLst/>
+        </p:spPr>
+        <p:style>
+          <a:lnRef idx="1">
+            <a:schemeClr val="accent1"/>
+          </a:lnRef>
+          <a:fillRef idx="3">
+            <a:schemeClr val="accent1"/>
+          </a:fillRef>
+          <a:effectRef idx="2">
+            <a:schemeClr val="accent1"/>
+          </a:effectRef>
+          <a:fontRef idx="minor">
+            <a:schemeClr val="lt1"/>
+          </a:fontRef>
+        </p:style>
+        <p:txBody>
+          <a:bodyPr rtlCol="0" anchor="ctr"/>
+          <a:lstStyle/>
+          <a:p>
+            <a:pPr algn="ctr"/>
+          </a:p>
+        </p:txBody>
+      </p:sp>
+      <p:sp>
+        <p:nvSpPr>
+          <p:cNvPr id="42" name="Freeform 41"/>
+          <p:cNvSpPr/>
+          <p:nvPr/>
+        </p:nvSpPr>
+        <p:spPr>
+          <a:xfrm>
+            <a:off x="7680959" y="753648"/>
+            <a:ext cx="329184" cy="233355"/>
+          </a:xfrm>
+          <a:custGeom>
+            <a:avLst/>
+            <a:gdLst/>
+            <a:ahLst/>
+            <a:cxnLst/>
+            <a:rect l="l" t="t" r="r" b="b"/>
+            <a:pathLst>
+              <a:path w="329184" h="233355">
+                <a:moveTo>
+                  <a:pt x="0" y="233355"/>
+                </a:moveTo>
+                <a:lnTo>
+                  <a:pt x="82296" y="116677"/>
+                </a:lnTo>
+                <a:lnTo>
+                  <a:pt x="155448" y="180320"/>
+                </a:lnTo>
+                <a:lnTo>
+                  <a:pt x="237744" y="0"/>
+                </a:lnTo>
+                <a:lnTo>
+                  <a:pt x="329184" y="63642"/>
+                </a:lnTo>
+              </a:path>
+            </a:pathLst>
+          </a:custGeom>
+          <a:noFill/>
+          <a:ln w="25400">
+            <a:solidFill>
+              <a:srgbClr val="309040"/>
+            </a:solidFill>
+          </a:ln>
+          <a:effectLst/>
+        </p:spPr>
+        <p:style>
+          <a:lnRef idx="1">
+            <a:schemeClr val="accent1"/>
+          </a:lnRef>
+          <a:fillRef idx="3">
+            <a:schemeClr val="accent1"/>
+          </a:fillRef>
+          <a:effectRef idx="2">
+            <a:schemeClr val="accent1"/>
+          </a:effectRef>
+          <a:fontRef idx="minor">
+            <a:schemeClr val="lt1"/>
+          </a:fontRef>
+        </p:style>
+        <p:txBody>
+          <a:bodyPr rtlCol="0" anchor="ctr"/>
+          <a:lstStyle/>
+          <a:p>
+            <a:pPr algn="ctr"/>
+          </a:p>
+        </p:txBody>
+      </p:sp>
+      <p:sp>
+        <p:nvSpPr>
+          <p:cNvPr id="43" name="Oval 42"/>
+          <p:cNvSpPr/>
+          <p:nvPr/>
+        </p:nvSpPr>
+        <p:spPr>
+          <a:xfrm>
+            <a:off x="7927774" y="658185"/>
+            <a:ext cx="127284" cy="127284"/>
+          </a:xfrm>
+          <a:prstGeom prst="ellipse">
+            <a:avLst/>
+          </a:prstGeom>
+          <a:solidFill>
+            <a:srgbClr val="D9A52C"/>
+          </a:solidFill>
+          <a:ln>
+            <a:noFill/>
+          </a:ln>
+          <a:effectLst/>
+        </p:spPr>
+        <p:style>
+          <a:lnRef idx="1">
+            <a:schemeClr val="accent1"/>
+          </a:lnRef>
+          <a:fillRef idx="3">
+            <a:schemeClr val="accent1"/>
+          </a:fillRef>
+          <a:effectRef idx="2">
+            <a:schemeClr val="accent1"/>
+          </a:effectRef>
+          <a:fontRef idx="minor">
+            <a:schemeClr val="lt1"/>
+          </a:fontRef>
+        </p:style>
+        <p:txBody>
+          <a:bodyPr rtlCol="0" anchor="ctr"/>
+          <a:lstStyle/>
+          <a:p>
+            <a:pPr algn="ctr"/>
+          </a:p>
+        </p:txBody>
+      </p:sp>
+      <p:sp>
+        <p:nvSpPr>
+          <p:cNvPr id="44" name="TextBox 43"/>
+          <p:cNvSpPr txBox="1"/>
+          <p:nvPr/>
+        </p:nvSpPr>
+        <p:spPr>
+          <a:xfrm>
+            <a:off x="7927774" y="636971"/>
+            <a:ext cx="127284" cy="127284"/>
+          </a:xfrm>
+          <a:prstGeom prst="rect">
+            <a:avLst/>
+          </a:prstGeom>
+          <a:noFill/>
+        </p:spPr>
+        <p:txBody>
+          <a:bodyPr wrap="square" anchor="ctr" lIns="0" rIns="0" tIns="0" bIns="0">
+            <a:spAutoFit/>
+          </a:bodyPr>
+          <a:lstStyle/>
+          <a:p>
+            <a:pPr algn="ctr">
+              <a:lnSpc>
+                <a:spcPct val="100000"/>
+              </a:lnSpc>
+            </a:pPr>
+            <a:r>
+              <a:rPr sz="800" b="1">
+                <a:solidFill>
+                  <a:srgbClr val="FFFFFF"/>
+                </a:solidFill>
+                <a:latin typeface="Microsoft JhengHei"/>
+              </a:rPr>
+              <a:t>$</a:t>
+            </a:r>
+          </a:p>
+        </p:txBody>
+      </p:sp>
+      <p:sp>
+        <p:nvSpPr>
+          <p:cNvPr id="45" name="TextBox 44"/>
+          <p:cNvSpPr txBox="1"/>
+          <p:nvPr/>
+        </p:nvSpPr>
+        <p:spPr>
+          <a:xfrm>
+            <a:off x="8238743" y="548640"/>
+            <a:ext cx="1271016" cy="685800"/>
+          </a:xfrm>
+          <a:prstGeom prst="rect">
+            <a:avLst/>
+          </a:prstGeom>
+          <a:noFill/>
+        </p:spPr>
+        <p:txBody>
+          <a:bodyPr wrap="square" anchor="ctr" lIns="0" rIns="0" tIns="0" bIns="0">
+            <a:spAutoFit/>
+          </a:bodyPr>
+          <a:lstStyle/>
+          <a:p>
+            <a:pPr algn="l">
+              <a:lnSpc>
+                <a:spcPct val="105000"/>
+              </a:lnSpc>
+            </a:pPr>
             <a:r>
               <a:rPr sz="950" b="1">
                 <a:solidFill>
@@ -5900,7 +7263,7 @@
       </p:sp>
       <p:sp>
         <p:nvSpPr>
-          <p:cNvPr id="18" name="Oval 17"/>
+          <p:cNvPr id="46" name="Oval 45"/>
           <p:cNvSpPr/>
           <p:nvPr/>
         </p:nvSpPr>
@@ -5946,7 +7309,7 @@
       </p:sp>
       <p:sp>
         <p:nvSpPr>
-          <p:cNvPr id="19" name="TextBox 18"/>
+          <p:cNvPr id="47" name="TextBox 46"/>
           <p:cNvSpPr txBox="1"/>
           <p:nvPr/>
         </p:nvSpPr>
@@ -6017,7 +7380,7 @@
       </p:sp>
       <p:sp>
         <p:nvSpPr>
-          <p:cNvPr id="20" name="Rounded Rectangle 19"/>
+          <p:cNvPr id="48" name="Rounded Rectangle 47"/>
           <p:cNvSpPr/>
           <p:nvPr/>
         </p:nvSpPr>
@@ -6062,7 +7425,7 @@
       </p:sp>
       <p:sp>
         <p:nvSpPr>
-          <p:cNvPr id="21" name="TextBox 20"/>
+          <p:cNvPr id="49" name="TextBox 48"/>
           <p:cNvSpPr txBox="1"/>
           <p:nvPr/>
         </p:nvSpPr>
@@ -6101,7 +7464,7 @@
       </p:sp>
       <p:sp>
         <p:nvSpPr>
-          <p:cNvPr id="22" name="TextBox 21"/>
+          <p:cNvPr id="50" name="TextBox 49"/>
           <p:cNvSpPr txBox="1"/>
           <p:nvPr/>
         </p:nvSpPr>
@@ -6140,7 +7503,7 @@
       </p:sp>
       <p:sp>
         <p:nvSpPr>
-          <p:cNvPr id="23" name="Rounded Rectangle 22"/>
+          <p:cNvPr id="51" name="Rounded Rectangle 50"/>
           <p:cNvSpPr/>
           <p:nvPr/>
         </p:nvSpPr>
@@ -6195,7 +7558,7 @@
       </p:sp>
       <p:sp>
         <p:nvSpPr>
-          <p:cNvPr id="24" name="Rounded Rectangle 23"/>
+          <p:cNvPr id="52" name="Rounded Rectangle 51"/>
           <p:cNvSpPr/>
           <p:nvPr/>
         </p:nvSpPr>
@@ -6250,7 +7613,7 @@
       </p:sp>
       <p:sp>
         <p:nvSpPr>
-          <p:cNvPr id="25" name="Rounded Rectangle 24"/>
+          <p:cNvPr id="53" name="Rounded Rectangle 52"/>
           <p:cNvSpPr/>
           <p:nvPr/>
         </p:nvSpPr>
@@ -6305,7 +7668,7 @@
       </p:sp>
       <p:sp>
         <p:nvSpPr>
-          <p:cNvPr id="26" name="Rounded Rectangle 25"/>
+          <p:cNvPr id="54" name="Rounded Rectangle 53"/>
           <p:cNvSpPr/>
           <p:nvPr/>
         </p:nvSpPr>
@@ -6351,7 +7714,7 @@
       </p:sp>
       <p:sp>
         <p:nvSpPr>
-          <p:cNvPr id="27" name="TextBox 26"/>
+          <p:cNvPr id="55" name="TextBox 54"/>
           <p:cNvSpPr txBox="1"/>
           <p:nvPr/>
         </p:nvSpPr>
@@ -6463,7 +7826,7 @@
       </p:sp>
       <p:cxnSp>
         <p:nvCxnSpPr>
-          <p:cNvPr id="28" name="Connector 27"/>
+          <p:cNvPr id="56" name="Connector 55"/>
           <p:cNvCxnSpPr/>
           <p:nvPr/>
         </p:nvCxnSpPr>
@@ -6476,1140 +7839,6 @@
             <a:avLst/>
           </a:prstGeom>
           <a:ln w="38100">
-            <a:solidFill>
-              <a:srgbClr val="8040A0"/>
-            </a:solidFill>
-            <a:tailEnd type="triangle" w="med" len="med"/>
-          </a:ln>
-        </p:spPr>
-        <p:style>
-          <a:lnRef idx="2">
-            <a:schemeClr val="accent1"/>
-          </a:lnRef>
-          <a:fillRef idx="0">
-            <a:schemeClr val="accent1"/>
-          </a:fillRef>
-          <a:effectRef idx="1">
-            <a:schemeClr val="accent1"/>
-          </a:effectRef>
-          <a:fontRef idx="minor">
-            <a:schemeClr val="tx1"/>
-          </a:fontRef>
-        </p:style>
-      </p:cxnSp>
-      <p:cxnSp>
-        <p:nvCxnSpPr>
-          <p:cNvPr id="29" name="Connector 28"/>
-          <p:cNvCxnSpPr/>
-          <p:nvPr/>
-        </p:nvCxnSpPr>
-        <p:spPr>
-          <a:xfrm>
-            <a:off x="6675120" y="2240280"/>
-            <a:ext cx="1874520" cy="0"/>
-          </a:xfrm>
-          <a:prstGeom prst="line">
-            <a:avLst/>
-          </a:prstGeom>
-          <a:ln w="22225">
-            <a:solidFill>
-              <a:srgbClr val="8040A0"/>
-            </a:solidFill>
-            <a:tailEnd type="triangle" w="med" len="med"/>
-          </a:ln>
-        </p:spPr>
-        <p:style>
-          <a:lnRef idx="2">
-            <a:schemeClr val="accent1"/>
-          </a:lnRef>
-          <a:fillRef idx="0">
-            <a:schemeClr val="accent1"/>
-          </a:fillRef>
-          <a:effectRef idx="1">
-            <a:schemeClr val="accent1"/>
-          </a:effectRef>
-          <a:fontRef idx="minor">
-            <a:schemeClr val="tx1"/>
-          </a:fontRef>
-        </p:style>
-      </p:cxnSp>
-      <p:cxnSp>
-        <p:nvCxnSpPr>
-          <p:cNvPr id="30" name="Connector 29"/>
-          <p:cNvCxnSpPr/>
-          <p:nvPr/>
-        </p:nvCxnSpPr>
-        <p:spPr>
-          <a:xfrm>
-            <a:off x="1508760" y="1417320"/>
-            <a:ext cx="0" cy="182880"/>
-          </a:xfrm>
-          <a:prstGeom prst="line">
-            <a:avLst/>
-          </a:prstGeom>
-          <a:ln w="22225">
-            <a:solidFill>
-              <a:srgbClr val="000000"/>
-            </a:solidFill>
-            <a:tailEnd type="triangle" w="med" len="med"/>
-          </a:ln>
-        </p:spPr>
-        <p:style>
-          <a:lnRef idx="2">
-            <a:schemeClr val="accent1"/>
-          </a:lnRef>
-          <a:fillRef idx="0">
-            <a:schemeClr val="accent1"/>
-          </a:fillRef>
-          <a:effectRef idx="1">
-            <a:schemeClr val="accent1"/>
-          </a:effectRef>
-          <a:fontRef idx="minor">
-            <a:schemeClr val="tx1"/>
-          </a:fontRef>
-        </p:style>
-      </p:cxnSp>
-      <p:cxnSp>
-        <p:nvCxnSpPr>
-          <p:cNvPr id="31" name="Connector 30"/>
-          <p:cNvCxnSpPr/>
-          <p:nvPr/>
-        </p:nvCxnSpPr>
-        <p:spPr>
-          <a:xfrm>
-            <a:off x="1508760" y="1600200"/>
-            <a:ext cx="960120" cy="0"/>
-          </a:xfrm>
-          <a:prstGeom prst="line">
-            <a:avLst/>
-          </a:prstGeom>
-          <a:ln w="22225">
-            <a:solidFill>
-              <a:srgbClr val="000000"/>
-            </a:solidFill>
-            <a:tailEnd type="triangle" w="med" len="med"/>
-          </a:ln>
-        </p:spPr>
-        <p:style>
-          <a:lnRef idx="2">
-            <a:schemeClr val="accent1"/>
-          </a:lnRef>
-          <a:fillRef idx="0">
-            <a:schemeClr val="accent1"/>
-          </a:fillRef>
-          <a:effectRef idx="1">
-            <a:schemeClr val="accent1"/>
-          </a:effectRef>
-          <a:fontRef idx="minor">
-            <a:schemeClr val="tx1"/>
-          </a:fontRef>
-        </p:style>
-      </p:cxnSp>
-      <p:cxnSp>
-        <p:nvCxnSpPr>
-          <p:cNvPr id="32" name="Connector 31"/>
-          <p:cNvCxnSpPr/>
-          <p:nvPr/>
-        </p:nvCxnSpPr>
-        <p:spPr>
-          <a:xfrm>
-            <a:off x="2468880" y="1600200"/>
-            <a:ext cx="0" cy="822960"/>
-          </a:xfrm>
-          <a:prstGeom prst="line">
-            <a:avLst/>
-          </a:prstGeom>
-          <a:ln w="22225">
-            <a:solidFill>
-              <a:srgbClr val="000000"/>
-            </a:solidFill>
-            <a:tailEnd type="triangle" w="med" len="med"/>
-          </a:ln>
-        </p:spPr>
-        <p:style>
-          <a:lnRef idx="2">
-            <a:schemeClr val="accent1"/>
-          </a:lnRef>
-          <a:fillRef idx="0">
-            <a:schemeClr val="accent1"/>
-          </a:fillRef>
-          <a:effectRef idx="1">
-            <a:schemeClr val="accent1"/>
-          </a:effectRef>
-          <a:fontRef idx="minor">
-            <a:schemeClr val="tx1"/>
-          </a:fontRef>
-        </p:style>
-      </p:cxnSp>
-      <p:cxnSp>
-        <p:nvCxnSpPr>
-          <p:cNvPr id="33" name="Connector 32"/>
-          <p:cNvCxnSpPr/>
-          <p:nvPr/>
-        </p:nvCxnSpPr>
-        <p:spPr>
-          <a:xfrm>
-            <a:off x="8549640" y="1417320"/>
-            <a:ext cx="0" cy="1344168"/>
-          </a:xfrm>
-          <a:prstGeom prst="line">
-            <a:avLst/>
-          </a:prstGeom>
-          <a:ln w="22225">
-            <a:solidFill>
-              <a:srgbClr val="C03030"/>
-            </a:solidFill>
-            <a:tailEnd type="triangle" w="med" len="med"/>
-          </a:ln>
-        </p:spPr>
-        <p:style>
-          <a:lnRef idx="2">
-            <a:schemeClr val="accent1"/>
-          </a:lnRef>
-          <a:fillRef idx="0">
-            <a:schemeClr val="accent1"/>
-          </a:fillRef>
-          <a:effectRef idx="1">
-            <a:schemeClr val="accent1"/>
-          </a:effectRef>
-          <a:fontRef idx="minor">
-            <a:schemeClr val="tx1"/>
-          </a:fontRef>
-        </p:style>
-      </p:cxnSp>
-      <p:cxnSp>
-        <p:nvCxnSpPr>
-          <p:cNvPr id="34" name="Connector 33"/>
-          <p:cNvCxnSpPr/>
-          <p:nvPr/>
-        </p:nvCxnSpPr>
-        <p:spPr>
-          <a:xfrm flipH="1">
-            <a:off x="6400800" y="2761488"/>
-            <a:ext cx="2148840" cy="0"/>
-          </a:xfrm>
-          <a:prstGeom prst="line">
-            <a:avLst/>
-          </a:prstGeom>
-          <a:ln w="22225">
-            <a:solidFill>
-              <a:srgbClr val="C03030"/>
-            </a:solidFill>
-            <a:tailEnd type="triangle" w="med" len="med"/>
-          </a:ln>
-        </p:spPr>
-        <p:style>
-          <a:lnRef idx="2">
-            <a:schemeClr val="accent1"/>
-          </a:lnRef>
-          <a:fillRef idx="0">
-            <a:schemeClr val="accent1"/>
-          </a:fillRef>
-          <a:effectRef idx="1">
-            <a:schemeClr val="accent1"/>
-          </a:effectRef>
-          <a:fontRef idx="minor">
-            <a:schemeClr val="tx1"/>
-          </a:fontRef>
-        </p:style>
-      </p:cxnSp>
-      <p:sp>
-        <p:nvSpPr>
-          <p:cNvPr id="35" name="Rounded Rectangle 34"/>
-          <p:cNvSpPr/>
-          <p:nvPr/>
-        </p:nvSpPr>
-        <p:spPr>
-          <a:xfrm>
-            <a:off x="182880" y="3749039"/>
-            <a:ext cx="11338560" cy="4206240"/>
-          </a:xfrm>
-          <a:prstGeom prst="roundRect">
-            <a:avLst/>
-          </a:prstGeom>
-          <a:noFill/>
-          <a:ln w="12700">
-            <a:solidFill>
-              <a:srgbClr val="404040"/>
-            </a:solidFill>
-            <a:prstDash val="sysDot"/>
-          </a:ln>
-          <a:effectLst/>
-        </p:spPr>
-        <p:style>
-          <a:lnRef idx="1">
-            <a:schemeClr val="accent1"/>
-          </a:lnRef>
-          <a:fillRef idx="3">
-            <a:schemeClr val="accent1"/>
-          </a:fillRef>
-          <a:effectRef idx="2">
-            <a:schemeClr val="accent1"/>
-          </a:effectRef>
-          <a:fontRef idx="minor">
-            <a:schemeClr val="lt1"/>
-          </a:fontRef>
-        </p:style>
-        <p:txBody>
-          <a:bodyPr rtlCol="0" anchor="ctr"/>
-          <a:lstStyle/>
-          <a:p>
-            <a:pPr algn="ctr"/>
-          </a:p>
-        </p:txBody>
-      </p:sp>
-      <p:sp>
-        <p:nvSpPr>
-          <p:cNvPr id="36" name="TextBox 35"/>
-          <p:cNvSpPr txBox="1"/>
-          <p:nvPr/>
-        </p:nvSpPr>
-        <p:spPr>
-          <a:xfrm>
-            <a:off x="182880" y="7589519"/>
-            <a:ext cx="11338560" cy="274320"/>
-          </a:xfrm>
-          <a:prstGeom prst="rect">
-            <a:avLst/>
-          </a:prstGeom>
-          <a:noFill/>
-        </p:spPr>
-        <p:txBody>
-          <a:bodyPr wrap="square" anchor="t" lIns="0" rIns="0" tIns="0" bIns="0">
-            <a:spAutoFit/>
-          </a:bodyPr>
-          <a:lstStyle/>
-          <a:p>
-            <a:pPr algn="ctr">
-              <a:lnSpc>
-                <a:spcPct val="100000"/>
-              </a:lnSpc>
-            </a:pPr>
-            <a:r>
-              <a:rPr sz="1200" b="1">
-                <a:solidFill>
-                  <a:srgbClr val="202020"/>
-                </a:solidFill>
-                <a:latin typeface="Microsoft JhengHei"/>
-              </a:rPr>
-              <a:t>分層長期記憶</a:t>
-            </a:r>
-          </a:p>
-        </p:txBody>
-      </p:sp>
-      <p:sp>
-        <p:nvSpPr>
-          <p:cNvPr id="37" name="Rounded Rectangle 36"/>
-          <p:cNvSpPr/>
-          <p:nvPr/>
-        </p:nvSpPr>
-        <p:spPr>
-          <a:xfrm>
-            <a:off x="548640" y="4069079"/>
-            <a:ext cx="3566160" cy="2148840"/>
-          </a:xfrm>
-          <a:prstGeom prst="roundRect">
-            <a:avLst/>
-          </a:prstGeom>
-          <a:solidFill>
-            <a:srgbClr val="D8E7F7"/>
-          </a:solidFill>
-          <a:ln w="12700">
-            <a:solidFill>
-              <a:srgbClr val="2E6DA4"/>
-            </a:solidFill>
-          </a:ln>
-          <a:effectLst/>
-        </p:spPr>
-        <p:style>
-          <a:lnRef idx="1">
-            <a:schemeClr val="accent1"/>
-          </a:lnRef>
-          <a:fillRef idx="3">
-            <a:schemeClr val="accent1"/>
-          </a:fillRef>
-          <a:effectRef idx="2">
-            <a:schemeClr val="accent1"/>
-          </a:effectRef>
-          <a:fontRef idx="minor">
-            <a:schemeClr val="lt1"/>
-          </a:fontRef>
-        </p:style>
-        <p:txBody>
-          <a:bodyPr rtlCol="0" anchor="ctr"/>
-          <a:lstStyle/>
-          <a:p>
-            <a:pPr algn="ctr"/>
-          </a:p>
-        </p:txBody>
-      </p:sp>
-      <p:sp>
-        <p:nvSpPr>
-          <p:cNvPr id="38" name="TextBox 37"/>
-          <p:cNvSpPr txBox="1"/>
-          <p:nvPr/>
-        </p:nvSpPr>
-        <p:spPr>
-          <a:xfrm>
-            <a:off x="685800" y="4160520"/>
-            <a:ext cx="1188720" cy="274320"/>
-          </a:xfrm>
-          <a:prstGeom prst="rect">
-            <a:avLst/>
-          </a:prstGeom>
-          <a:noFill/>
-        </p:spPr>
-        <p:txBody>
-          <a:bodyPr wrap="square" anchor="t" lIns="0" rIns="0" tIns="0" bIns="0">
-            <a:spAutoFit/>
-          </a:bodyPr>
-          <a:lstStyle/>
-          <a:p>
-            <a:pPr algn="l">
-              <a:lnSpc>
-                <a:spcPct val="100000"/>
-              </a:lnSpc>
-            </a:pPr>
-            <a:r>
-              <a:rPr sz="950" b="1">
-                <a:solidFill>
-                  <a:srgbClr val="2E6DA4"/>
-                </a:solidFill>
-                <a:latin typeface="Microsoft JhengHei"/>
-              </a:rPr>
-              <a:t>Top K</a:t>
-            </a:r>
-          </a:p>
-        </p:txBody>
-      </p:sp>
-      <p:sp>
-        <p:nvSpPr>
-          <p:cNvPr id="39" name="TextBox 38"/>
-          <p:cNvSpPr txBox="1"/>
-          <p:nvPr/>
-        </p:nvSpPr>
-        <p:spPr>
-          <a:xfrm>
-            <a:off x="685800" y="4407407"/>
-            <a:ext cx="3291840" cy="274320"/>
-          </a:xfrm>
-          <a:prstGeom prst="rect">
-            <a:avLst/>
-          </a:prstGeom>
-          <a:noFill/>
-        </p:spPr>
-        <p:txBody>
-          <a:bodyPr wrap="square" anchor="t" lIns="0" rIns="0" tIns="0" bIns="0">
-            <a:spAutoFit/>
-          </a:bodyPr>
-          <a:lstStyle/>
-          <a:p>
-            <a:pPr algn="l">
-              <a:lnSpc>
-                <a:spcPct val="100000"/>
-              </a:lnSpc>
-            </a:pPr>
-            <a:r>
-              <a:rPr sz="850" b="1">
-                <a:solidFill>
-                  <a:srgbClr val="2E6DA4"/>
-                </a:solidFill>
-                <a:latin typeface="Microsoft JhengHei"/>
-              </a:rPr>
-              <a:t>衰減比例(淺層)</a:t>
-            </a:r>
-          </a:p>
-        </p:txBody>
-      </p:sp>
-      <p:sp>
-        <p:nvSpPr>
-          <p:cNvPr id="40" name="Rounded Rectangle 39"/>
-          <p:cNvSpPr/>
-          <p:nvPr/>
-        </p:nvSpPr>
-        <p:spPr>
-          <a:xfrm>
-            <a:off x="731520" y="4709159"/>
-            <a:ext cx="3200400" cy="822960"/>
-          </a:xfrm>
-          <a:prstGeom prst="roundRect">
-            <a:avLst/>
-          </a:prstGeom>
-          <a:solidFill>
-            <a:srgbClr val="FFFFFF"/>
-          </a:solidFill>
-          <a:ln w="12700">
-            <a:solidFill>
-              <a:srgbClr val="404040"/>
-            </a:solidFill>
-          </a:ln>
-          <a:effectLst/>
-        </p:spPr>
-        <p:style>
-          <a:lnRef idx="1">
-            <a:schemeClr val="accent1"/>
-          </a:lnRef>
-          <a:fillRef idx="3">
-            <a:schemeClr val="accent1"/>
-          </a:fillRef>
-          <a:effectRef idx="2">
-            <a:schemeClr val="accent1"/>
-          </a:effectRef>
-          <a:fontRef idx="minor">
-            <a:schemeClr val="lt1"/>
-          </a:fontRef>
-        </p:style>
-        <p:txBody>
-          <a:bodyPr rtlCol="0" anchor="ctr" wrap="square" lIns="30000" rIns="30000"/>
-          <a:lstStyle/>
-          <a:p>
-            <a:pPr algn="ctr"/>
-            <a:r>
-              <a:rPr sz="850" b="1">
-                <a:solidFill>
-                  <a:srgbClr val="202020"/>
-                </a:solidFill>
-                <a:latin typeface="Microsoft JhengHei"/>
-              </a:rPr>
-              <a:t>每日市場新聞洞見</a:t>
-            </a:r>
-          </a:p>
-        </p:txBody>
-      </p:sp>
-      <p:sp>
-        <p:nvSpPr>
-          <p:cNvPr id="41" name="TextBox 40"/>
-          <p:cNvSpPr txBox="1"/>
-          <p:nvPr/>
-        </p:nvSpPr>
-        <p:spPr>
-          <a:xfrm>
-            <a:off x="548640" y="5623559"/>
-            <a:ext cx="3566160" cy="274320"/>
-          </a:xfrm>
-          <a:prstGeom prst="rect">
-            <a:avLst/>
-          </a:prstGeom>
-          <a:noFill/>
-        </p:spPr>
-        <p:txBody>
-          <a:bodyPr wrap="square" anchor="t" lIns="0" rIns="0" tIns="0" bIns="0">
-            <a:spAutoFit/>
-          </a:bodyPr>
-          <a:lstStyle/>
-          <a:p>
-            <a:pPr algn="ctr">
-              <a:lnSpc>
-                <a:spcPct val="100000"/>
-              </a:lnSpc>
-            </a:pPr>
-            <a:r>
-              <a:rPr sz="1000" b="1">
-                <a:solidFill>
-                  <a:srgbClr val="202020"/>
-                </a:solidFill>
-                <a:latin typeface="Microsoft JhengHei"/>
-              </a:rPr>
-              <a:t>淺層處理層</a:t>
-            </a:r>
-          </a:p>
-        </p:txBody>
-      </p:sp>
-      <p:sp>
-        <p:nvSpPr>
-          <p:cNvPr id="42" name="Rounded Rectangle 41"/>
-          <p:cNvSpPr/>
-          <p:nvPr/>
-        </p:nvSpPr>
-        <p:spPr>
-          <a:xfrm>
-            <a:off x="4434840" y="4069079"/>
-            <a:ext cx="3566160" cy="2148840"/>
-          </a:xfrm>
-          <a:prstGeom prst="roundRect">
-            <a:avLst/>
-          </a:prstGeom>
-          <a:solidFill>
-            <a:srgbClr val="DCF0DC"/>
-          </a:solidFill>
-          <a:ln w="12700">
-            <a:solidFill>
-              <a:srgbClr val="309040"/>
-            </a:solidFill>
-          </a:ln>
-          <a:effectLst/>
-        </p:spPr>
-        <p:style>
-          <a:lnRef idx="1">
-            <a:schemeClr val="accent1"/>
-          </a:lnRef>
-          <a:fillRef idx="3">
-            <a:schemeClr val="accent1"/>
-          </a:fillRef>
-          <a:effectRef idx="2">
-            <a:schemeClr val="accent1"/>
-          </a:effectRef>
-          <a:fontRef idx="minor">
-            <a:schemeClr val="lt1"/>
-          </a:fontRef>
-        </p:style>
-        <p:txBody>
-          <a:bodyPr rtlCol="0" anchor="ctr"/>
-          <a:lstStyle/>
-          <a:p>
-            <a:pPr algn="ctr"/>
-          </a:p>
-        </p:txBody>
-      </p:sp>
-      <p:sp>
-        <p:nvSpPr>
-          <p:cNvPr id="43" name="TextBox 42"/>
-          <p:cNvSpPr txBox="1"/>
-          <p:nvPr/>
-        </p:nvSpPr>
-        <p:spPr>
-          <a:xfrm>
-            <a:off x="4572000" y="4160520"/>
-            <a:ext cx="1188720" cy="274320"/>
-          </a:xfrm>
-          <a:prstGeom prst="rect">
-            <a:avLst/>
-          </a:prstGeom>
-          <a:noFill/>
-        </p:spPr>
-        <p:txBody>
-          <a:bodyPr wrap="square" anchor="t" lIns="0" rIns="0" tIns="0" bIns="0">
-            <a:spAutoFit/>
-          </a:bodyPr>
-          <a:lstStyle/>
-          <a:p>
-            <a:pPr algn="l">
-              <a:lnSpc>
-                <a:spcPct val="100000"/>
-              </a:lnSpc>
-            </a:pPr>
-            <a:r>
-              <a:rPr sz="950" b="1">
-                <a:solidFill>
-                  <a:srgbClr val="309040"/>
-                </a:solidFill>
-                <a:latin typeface="Microsoft JhengHei"/>
-              </a:rPr>
-              <a:t>Top K</a:t>
-            </a:r>
-          </a:p>
-        </p:txBody>
-      </p:sp>
-      <p:sp>
-        <p:nvSpPr>
-          <p:cNvPr id="44" name="TextBox 43"/>
-          <p:cNvSpPr txBox="1"/>
-          <p:nvPr/>
-        </p:nvSpPr>
-        <p:spPr>
-          <a:xfrm>
-            <a:off x="4572000" y="4407407"/>
-            <a:ext cx="3291840" cy="274320"/>
-          </a:xfrm>
-          <a:prstGeom prst="rect">
-            <a:avLst/>
-          </a:prstGeom>
-          <a:noFill/>
-        </p:spPr>
-        <p:txBody>
-          <a:bodyPr wrap="square" anchor="t" lIns="0" rIns="0" tIns="0" bIns="0">
-            <a:spAutoFit/>
-          </a:bodyPr>
-          <a:lstStyle/>
-          <a:p>
-            <a:pPr algn="l">
-              <a:lnSpc>
-                <a:spcPct val="100000"/>
-              </a:lnSpc>
-            </a:pPr>
-            <a:r>
-              <a:rPr sz="850" b="1">
-                <a:solidFill>
-                  <a:srgbClr val="309040"/>
-                </a:solidFill>
-                <a:latin typeface="Microsoft JhengHei"/>
-              </a:rPr>
-              <a:t>衰減比例(中層)</a:t>
-            </a:r>
-          </a:p>
-        </p:txBody>
-      </p:sp>
-      <p:sp>
-        <p:nvSpPr>
-          <p:cNvPr id="45" name="Rounded Rectangle 44"/>
-          <p:cNvSpPr/>
-          <p:nvPr/>
-        </p:nvSpPr>
-        <p:spPr>
-          <a:xfrm>
-            <a:off x="4617720" y="4709159"/>
-            <a:ext cx="3200400" cy="822960"/>
-          </a:xfrm>
-          <a:prstGeom prst="roundRect">
-            <a:avLst/>
-          </a:prstGeom>
-          <a:solidFill>
-            <a:srgbClr val="FFFFFF"/>
-          </a:solidFill>
-          <a:ln w="12700">
-            <a:solidFill>
-              <a:srgbClr val="404040"/>
-            </a:solidFill>
-          </a:ln>
-          <a:effectLst/>
-        </p:spPr>
-        <p:style>
-          <a:lnRef idx="1">
-            <a:schemeClr val="accent1"/>
-          </a:lnRef>
-          <a:fillRef idx="3">
-            <a:schemeClr val="accent1"/>
-          </a:fillRef>
-          <a:effectRef idx="2">
-            <a:schemeClr val="accent1"/>
-          </a:effectRef>
-          <a:fontRef idx="minor">
-            <a:schemeClr val="lt1"/>
-          </a:fontRef>
-        </p:style>
-        <p:txBody>
-          <a:bodyPr rtlCol="0" anchor="ctr" wrap="square" lIns="30000" rIns="30000"/>
-          <a:lstStyle/>
-          <a:p>
-            <a:pPr algn="ctr"/>
-            <a:r>
-              <a:rPr sz="850" b="1">
-                <a:solidFill>
-                  <a:srgbClr val="202020"/>
-                </a:solidFill>
-                <a:latin typeface="Microsoft JhengHei"/>
-              </a:rPr>
-              <a:t>公司 10-Q 報告洞見</a:t>
-            </a:r>
-          </a:p>
-        </p:txBody>
-      </p:sp>
-      <p:sp>
-        <p:nvSpPr>
-          <p:cNvPr id="46" name="TextBox 45"/>
-          <p:cNvSpPr txBox="1"/>
-          <p:nvPr/>
-        </p:nvSpPr>
-        <p:spPr>
-          <a:xfrm>
-            <a:off x="4434840" y="5623559"/>
-            <a:ext cx="3566160" cy="274320"/>
-          </a:xfrm>
-          <a:prstGeom prst="rect">
-            <a:avLst/>
-          </a:prstGeom>
-          <a:noFill/>
-        </p:spPr>
-        <p:txBody>
-          <a:bodyPr wrap="square" anchor="t" lIns="0" rIns="0" tIns="0" bIns="0">
-            <a:spAutoFit/>
-          </a:bodyPr>
-          <a:lstStyle/>
-          <a:p>
-            <a:pPr algn="ctr">
-              <a:lnSpc>
-                <a:spcPct val="100000"/>
-              </a:lnSpc>
-            </a:pPr>
-            <a:r>
-              <a:rPr sz="1000" b="1">
-                <a:solidFill>
-                  <a:srgbClr val="202020"/>
-                </a:solidFill>
-                <a:latin typeface="Microsoft JhengHei"/>
-              </a:rPr>
-              <a:t>中層處理層</a:t>
-            </a:r>
-          </a:p>
-        </p:txBody>
-      </p:sp>
-      <p:sp>
-        <p:nvSpPr>
-          <p:cNvPr id="47" name="Rounded Rectangle 46"/>
-          <p:cNvSpPr/>
-          <p:nvPr/>
-        </p:nvSpPr>
-        <p:spPr>
-          <a:xfrm>
-            <a:off x="8321040" y="4069079"/>
-            <a:ext cx="3566160" cy="2148840"/>
-          </a:xfrm>
-          <a:prstGeom prst="roundRect">
-            <a:avLst/>
-          </a:prstGeom>
-          <a:solidFill>
-            <a:srgbClr val="F5E3C8"/>
-          </a:solidFill>
-          <a:ln w="12700">
-            <a:solidFill>
-              <a:srgbClr val="B07020"/>
-            </a:solidFill>
-          </a:ln>
-          <a:effectLst/>
-        </p:spPr>
-        <p:style>
-          <a:lnRef idx="1">
-            <a:schemeClr val="accent1"/>
-          </a:lnRef>
-          <a:fillRef idx="3">
-            <a:schemeClr val="accent1"/>
-          </a:fillRef>
-          <a:effectRef idx="2">
-            <a:schemeClr val="accent1"/>
-          </a:effectRef>
-          <a:fontRef idx="minor">
-            <a:schemeClr val="lt1"/>
-          </a:fontRef>
-        </p:style>
-        <p:txBody>
-          <a:bodyPr rtlCol="0" anchor="ctr"/>
-          <a:lstStyle/>
-          <a:p>
-            <a:pPr algn="ctr"/>
-          </a:p>
-        </p:txBody>
-      </p:sp>
-      <p:sp>
-        <p:nvSpPr>
-          <p:cNvPr id="48" name="TextBox 47"/>
-          <p:cNvSpPr txBox="1"/>
-          <p:nvPr/>
-        </p:nvSpPr>
-        <p:spPr>
-          <a:xfrm>
-            <a:off x="8458200" y="4160520"/>
-            <a:ext cx="1188720" cy="274320"/>
-          </a:xfrm>
-          <a:prstGeom prst="rect">
-            <a:avLst/>
-          </a:prstGeom>
-          <a:noFill/>
-        </p:spPr>
-        <p:txBody>
-          <a:bodyPr wrap="square" anchor="t" lIns="0" rIns="0" tIns="0" bIns="0">
-            <a:spAutoFit/>
-          </a:bodyPr>
-          <a:lstStyle/>
-          <a:p>
-            <a:pPr algn="l">
-              <a:lnSpc>
-                <a:spcPct val="100000"/>
-              </a:lnSpc>
-            </a:pPr>
-            <a:r>
-              <a:rPr sz="950" b="1">
-                <a:solidFill>
-                  <a:srgbClr val="B07020"/>
-                </a:solidFill>
-                <a:latin typeface="Microsoft JhengHei"/>
-              </a:rPr>
-              <a:t>Top K</a:t>
-            </a:r>
-          </a:p>
-        </p:txBody>
-      </p:sp>
-      <p:sp>
-        <p:nvSpPr>
-          <p:cNvPr id="49" name="TextBox 48"/>
-          <p:cNvSpPr txBox="1"/>
-          <p:nvPr/>
-        </p:nvSpPr>
-        <p:spPr>
-          <a:xfrm>
-            <a:off x="8458200" y="4407407"/>
-            <a:ext cx="3291840" cy="274320"/>
-          </a:xfrm>
-          <a:prstGeom prst="rect">
-            <a:avLst/>
-          </a:prstGeom>
-          <a:noFill/>
-        </p:spPr>
-        <p:txBody>
-          <a:bodyPr wrap="square" anchor="t" lIns="0" rIns="0" tIns="0" bIns="0">
-            <a:spAutoFit/>
-          </a:bodyPr>
-          <a:lstStyle/>
-          <a:p>
-            <a:pPr algn="l">
-              <a:lnSpc>
-                <a:spcPct val="100000"/>
-              </a:lnSpc>
-            </a:pPr>
-            <a:r>
-              <a:rPr sz="850" b="1">
-                <a:solidFill>
-                  <a:srgbClr val="B07020"/>
-                </a:solidFill>
-                <a:latin typeface="Microsoft JhengHei"/>
-              </a:rPr>
-              <a:t>衰減比例(深層)</a:t>
-            </a:r>
-          </a:p>
-        </p:txBody>
-      </p:sp>
-      <p:sp>
-        <p:nvSpPr>
-          <p:cNvPr id="50" name="Rounded Rectangle 49"/>
-          <p:cNvSpPr/>
-          <p:nvPr/>
-        </p:nvSpPr>
-        <p:spPr>
-          <a:xfrm>
-            <a:off x="8503919" y="4709159"/>
-            <a:ext cx="3200400" cy="822960"/>
-          </a:xfrm>
-          <a:prstGeom prst="roundRect">
-            <a:avLst/>
-          </a:prstGeom>
-          <a:solidFill>
-            <a:srgbClr val="FFFFFF"/>
-          </a:solidFill>
-          <a:ln w="12700">
-            <a:solidFill>
-              <a:srgbClr val="404040"/>
-            </a:solidFill>
-          </a:ln>
-          <a:effectLst/>
-        </p:spPr>
-        <p:style>
-          <a:lnRef idx="1">
-            <a:schemeClr val="accent1"/>
-          </a:lnRef>
-          <a:fillRef idx="3">
-            <a:schemeClr val="accent1"/>
-          </a:fillRef>
-          <a:effectRef idx="2">
-            <a:schemeClr val="accent1"/>
-          </a:effectRef>
-          <a:fontRef idx="minor">
-            <a:schemeClr val="lt1"/>
-          </a:fontRef>
-        </p:style>
-        <p:txBody>
-          <a:bodyPr rtlCol="0" anchor="ctr" wrap="square" lIns="30000" rIns="30000"/>
-          <a:lstStyle/>
-          <a:p>
-            <a:pPr algn="ctr"/>
-            <a:r>
-              <a:rPr sz="850" b="1">
-                <a:solidFill>
-                  <a:srgbClr val="202020"/>
-                </a:solidFill>
-                <a:latin typeface="Microsoft JhengHei"/>
-              </a:rPr>
-              <a:t>延伸反思　　公司 10-K 報告洞見</a:t>
-            </a:r>
-          </a:p>
-        </p:txBody>
-      </p:sp>
-      <p:sp>
-        <p:nvSpPr>
-          <p:cNvPr id="51" name="TextBox 50"/>
-          <p:cNvSpPr txBox="1"/>
-          <p:nvPr/>
-        </p:nvSpPr>
-        <p:spPr>
-          <a:xfrm>
-            <a:off x="8321040" y="5623559"/>
-            <a:ext cx="3566160" cy="274320"/>
-          </a:xfrm>
-          <a:prstGeom prst="rect">
-            <a:avLst/>
-          </a:prstGeom>
-          <a:noFill/>
-        </p:spPr>
-        <p:txBody>
-          <a:bodyPr wrap="square" anchor="t" lIns="0" rIns="0" tIns="0" bIns="0">
-            <a:spAutoFit/>
-          </a:bodyPr>
-          <a:lstStyle/>
-          <a:p>
-            <a:pPr algn="ctr">
-              <a:lnSpc>
-                <a:spcPct val="100000"/>
-              </a:lnSpc>
-            </a:pPr>
-            <a:r>
-              <a:rPr sz="1000" b="1">
-                <a:solidFill>
-                  <a:srgbClr val="202020"/>
-                </a:solidFill>
-                <a:latin typeface="Microsoft JhengHei"/>
-              </a:rPr>
-              <a:t>深層處理層</a:t>
-            </a:r>
-          </a:p>
-        </p:txBody>
-      </p:sp>
-      <p:cxnSp>
-        <p:nvCxnSpPr>
-          <p:cNvPr id="52" name="Connector 51"/>
-          <p:cNvCxnSpPr/>
-          <p:nvPr/>
-        </p:nvCxnSpPr>
-        <p:spPr>
-          <a:xfrm flipV="1">
-            <a:off x="2331720" y="3108960"/>
-            <a:ext cx="0" cy="960119"/>
-          </a:xfrm>
-          <a:prstGeom prst="line">
-            <a:avLst/>
-          </a:prstGeom>
-          <a:ln w="19050">
-            <a:solidFill>
-              <a:srgbClr val="309040"/>
-            </a:solidFill>
-            <a:tailEnd type="triangle" w="med" len="med"/>
-          </a:ln>
-        </p:spPr>
-        <p:style>
-          <a:lnRef idx="2">
-            <a:schemeClr val="accent1"/>
-          </a:lnRef>
-          <a:fillRef idx="0">
-            <a:schemeClr val="accent1"/>
-          </a:fillRef>
-          <a:effectRef idx="1">
-            <a:schemeClr val="accent1"/>
-          </a:effectRef>
-          <a:fontRef idx="minor">
-            <a:schemeClr val="tx1"/>
-          </a:fontRef>
-        </p:style>
-      </p:cxnSp>
-      <p:cxnSp>
-        <p:nvCxnSpPr>
-          <p:cNvPr id="53" name="Connector 52"/>
-          <p:cNvCxnSpPr/>
-          <p:nvPr/>
-        </p:nvCxnSpPr>
-        <p:spPr>
-          <a:xfrm>
-            <a:off x="2331720" y="3108960"/>
-            <a:ext cx="1874520" cy="0"/>
-          </a:xfrm>
-          <a:prstGeom prst="line">
-            <a:avLst/>
-          </a:prstGeom>
-          <a:ln w="19050">
-            <a:solidFill>
-              <a:srgbClr val="309040"/>
-            </a:solidFill>
-            <a:tailEnd type="triangle" w="med" len="med"/>
-          </a:ln>
-        </p:spPr>
-        <p:style>
-          <a:lnRef idx="2">
-            <a:schemeClr val="accent1"/>
-          </a:lnRef>
-          <a:fillRef idx="0">
-            <a:schemeClr val="accent1"/>
-          </a:fillRef>
-          <a:effectRef idx="1">
-            <a:schemeClr val="accent1"/>
-          </a:effectRef>
-          <a:fontRef idx="minor">
-            <a:schemeClr val="tx1"/>
-          </a:fontRef>
-        </p:style>
-      </p:cxnSp>
-      <p:cxnSp>
-        <p:nvCxnSpPr>
-          <p:cNvPr id="54" name="Connector 53"/>
-          <p:cNvCxnSpPr/>
-          <p:nvPr/>
-        </p:nvCxnSpPr>
-        <p:spPr>
-          <a:xfrm>
-            <a:off x="4206240" y="3108960"/>
-            <a:ext cx="0" cy="182879"/>
-          </a:xfrm>
-          <a:prstGeom prst="line">
-            <a:avLst/>
-          </a:prstGeom>
-          <a:ln w="19050">
-            <a:solidFill>
-              <a:srgbClr val="309040"/>
-            </a:solidFill>
-            <a:tailEnd type="triangle" w="med" len="med"/>
-          </a:ln>
-        </p:spPr>
-        <p:style>
-          <a:lnRef idx="2">
-            <a:schemeClr val="accent1"/>
-          </a:lnRef>
-          <a:fillRef idx="0">
-            <a:schemeClr val="accent1"/>
-          </a:fillRef>
-          <a:effectRef idx="1">
-            <a:schemeClr val="accent1"/>
-          </a:effectRef>
-          <a:fontRef idx="minor">
-            <a:schemeClr val="tx1"/>
-          </a:fontRef>
-        </p:style>
-      </p:cxnSp>
-      <p:cxnSp>
-        <p:nvCxnSpPr>
-          <p:cNvPr id="55" name="Connector 54"/>
-          <p:cNvCxnSpPr/>
-          <p:nvPr/>
-        </p:nvCxnSpPr>
-        <p:spPr>
-          <a:xfrm flipV="1">
-            <a:off x="6263640" y="3291839"/>
-            <a:ext cx="0" cy="777240"/>
-          </a:xfrm>
-          <a:prstGeom prst="line">
-            <a:avLst/>
-          </a:prstGeom>
-          <a:ln w="19050">
-            <a:solidFill>
-              <a:srgbClr val="309040"/>
-            </a:solidFill>
-            <a:tailEnd type="triangle" w="med" len="med"/>
-          </a:ln>
-        </p:spPr>
-        <p:style>
-          <a:lnRef idx="2">
-            <a:schemeClr val="accent1"/>
-          </a:lnRef>
-          <a:fillRef idx="0">
-            <a:schemeClr val="accent1"/>
-          </a:fillRef>
-          <a:effectRef idx="1">
-            <a:schemeClr val="accent1"/>
-          </a:effectRef>
-          <a:fontRef idx="minor">
-            <a:schemeClr val="tx1"/>
-          </a:fontRef>
-        </p:style>
-      </p:cxnSp>
-      <p:cxnSp>
-        <p:nvCxnSpPr>
-          <p:cNvPr id="56" name="Connector 55"/>
-          <p:cNvCxnSpPr/>
-          <p:nvPr/>
-        </p:nvCxnSpPr>
-        <p:spPr>
-          <a:xfrm flipV="1">
-            <a:off x="9646920" y="3474720"/>
-            <a:ext cx="0" cy="594359"/>
-          </a:xfrm>
-          <a:prstGeom prst="line">
-            <a:avLst/>
-          </a:prstGeom>
-          <a:ln w="19050">
             <a:solidFill>
               <a:srgbClr val="8040A0"/>
             </a:solidFill>
@@ -7638,14 +7867,14 @@
           <p:nvPr/>
         </p:nvCxnSpPr>
         <p:spPr>
-          <a:xfrm flipH="1">
-            <a:off x="6126480" y="3474720"/>
-            <a:ext cx="3520440" cy="0"/>
+          <a:xfrm>
+            <a:off x="6675120" y="2240280"/>
+            <a:ext cx="1874520" cy="0"/>
           </a:xfrm>
           <a:prstGeom prst="line">
             <a:avLst/>
           </a:prstGeom>
-          <a:ln w="19050">
+          <a:ln w="22225">
             <a:solidFill>
               <a:srgbClr val="8040A0"/>
             </a:solidFill>
@@ -7674,16 +7903,16 @@
           <p:nvPr/>
         </p:nvCxnSpPr>
         <p:spPr>
-          <a:xfrm flipV="1">
-            <a:off x="6126480" y="3291839"/>
-            <a:ext cx="0" cy="182881"/>
+          <a:xfrm>
+            <a:off x="1508760" y="1417320"/>
+            <a:ext cx="0" cy="182880"/>
           </a:xfrm>
           <a:prstGeom prst="line">
             <a:avLst/>
           </a:prstGeom>
-          <a:ln w="19050">
+          <a:ln w="22225">
             <a:solidFill>
-              <a:srgbClr val="8040A0"/>
+              <a:srgbClr val="000000"/>
             </a:solidFill>
             <a:tailEnd type="triangle" w="med" len="med"/>
           </a:ln>
@@ -7711,17 +7940,17 @@
         </p:nvCxnSpPr>
         <p:spPr>
           <a:xfrm>
-            <a:off x="4114800" y="5120640"/>
-            <a:ext cx="320040" cy="0"/>
+            <a:off x="1508760" y="1600200"/>
+            <a:ext cx="960120" cy="0"/>
           </a:xfrm>
           <a:prstGeom prst="line">
             <a:avLst/>
           </a:prstGeom>
-          <a:ln w="19050">
+          <a:ln w="22225">
             <a:solidFill>
-              <a:srgbClr val="D09030"/>
+              <a:srgbClr val="000000"/>
             </a:solidFill>
-            <a:prstDash val="dash"/>
+            <a:tailEnd type="triangle" w="med" len="med"/>
           </a:ln>
         </p:spPr>
         <p:style>
@@ -7747,17 +7976,17 @@
         </p:nvCxnSpPr>
         <p:spPr>
           <a:xfrm>
-            <a:off x="8001000" y="5120640"/>
-            <a:ext cx="320040" cy="0"/>
+            <a:off x="2468880" y="1600200"/>
+            <a:ext cx="0" cy="822960"/>
           </a:xfrm>
           <a:prstGeom prst="line">
             <a:avLst/>
           </a:prstGeom>
-          <a:ln w="19050">
+          <a:ln w="22225">
             <a:solidFill>
-              <a:srgbClr val="D09030"/>
+              <a:srgbClr val="000000"/>
             </a:solidFill>
-            <a:prstDash val="dash"/>
+            <a:tailEnd type="triangle" w="med" len="med"/>
           </a:ln>
         </p:spPr>
         <p:style>
@@ -7783,17 +8012,17 @@
         </p:nvCxnSpPr>
         <p:spPr>
           <a:xfrm>
-            <a:off x="2331720" y="6217920"/>
-            <a:ext cx="0" cy="365759"/>
+            <a:off x="8549640" y="1417320"/>
+            <a:ext cx="0" cy="1344168"/>
           </a:xfrm>
           <a:prstGeom prst="line">
             <a:avLst/>
           </a:prstGeom>
-          <a:ln w="19050">
+          <a:ln w="22225">
             <a:solidFill>
-              <a:srgbClr val="D09030"/>
+              <a:srgbClr val="C03030"/>
             </a:solidFill>
-            <a:prstDash val="dash"/>
+            <a:tailEnd type="triangle" w="med" len="med"/>
           </a:ln>
         </p:spPr>
         <p:style>
@@ -7818,18 +8047,898 @@
           <p:nvPr/>
         </p:nvCxnSpPr>
         <p:spPr>
-          <a:xfrm>
-            <a:off x="6263640" y="6217920"/>
-            <a:ext cx="0" cy="365759"/>
+          <a:xfrm flipH="1">
+            <a:off x="6400800" y="2761488"/>
+            <a:ext cx="2148840" cy="0"/>
+          </a:xfrm>
+          <a:prstGeom prst="line">
+            <a:avLst/>
+          </a:prstGeom>
+          <a:ln w="22225">
+            <a:solidFill>
+              <a:srgbClr val="C03030"/>
+            </a:solidFill>
+            <a:tailEnd type="triangle" w="med" len="med"/>
+          </a:ln>
+        </p:spPr>
+        <p:style>
+          <a:lnRef idx="2">
+            <a:schemeClr val="accent1"/>
+          </a:lnRef>
+          <a:fillRef idx="0">
+            <a:schemeClr val="accent1"/>
+          </a:fillRef>
+          <a:effectRef idx="1">
+            <a:schemeClr val="accent1"/>
+          </a:effectRef>
+          <a:fontRef idx="minor">
+            <a:schemeClr val="tx1"/>
+          </a:fontRef>
+        </p:style>
+      </p:cxnSp>
+      <p:sp>
+        <p:nvSpPr>
+          <p:cNvPr id="63" name="Rounded Rectangle 62"/>
+          <p:cNvSpPr/>
+          <p:nvPr/>
+        </p:nvSpPr>
+        <p:spPr>
+          <a:xfrm>
+            <a:off x="182880" y="3749039"/>
+            <a:ext cx="11338560" cy="4206240"/>
+          </a:xfrm>
+          <a:prstGeom prst="roundRect">
+            <a:avLst/>
+          </a:prstGeom>
+          <a:noFill/>
+          <a:ln w="12700">
+            <a:solidFill>
+              <a:srgbClr val="404040"/>
+            </a:solidFill>
+            <a:prstDash val="sysDot"/>
+          </a:ln>
+          <a:effectLst/>
+        </p:spPr>
+        <p:style>
+          <a:lnRef idx="1">
+            <a:schemeClr val="accent1"/>
+          </a:lnRef>
+          <a:fillRef idx="3">
+            <a:schemeClr val="accent1"/>
+          </a:fillRef>
+          <a:effectRef idx="2">
+            <a:schemeClr val="accent1"/>
+          </a:effectRef>
+          <a:fontRef idx="minor">
+            <a:schemeClr val="lt1"/>
+          </a:fontRef>
+        </p:style>
+        <p:txBody>
+          <a:bodyPr rtlCol="0" anchor="ctr"/>
+          <a:lstStyle/>
+          <a:p>
+            <a:pPr algn="ctr"/>
+          </a:p>
+        </p:txBody>
+      </p:sp>
+      <p:sp>
+        <p:nvSpPr>
+          <p:cNvPr id="64" name="TextBox 63"/>
+          <p:cNvSpPr txBox="1"/>
+          <p:nvPr/>
+        </p:nvSpPr>
+        <p:spPr>
+          <a:xfrm>
+            <a:off x="182880" y="7589519"/>
+            <a:ext cx="11338560" cy="274320"/>
+          </a:xfrm>
+          <a:prstGeom prst="rect">
+            <a:avLst/>
+          </a:prstGeom>
+          <a:noFill/>
+        </p:spPr>
+        <p:txBody>
+          <a:bodyPr wrap="square" anchor="t" lIns="0" rIns="0" tIns="0" bIns="0">
+            <a:spAutoFit/>
+          </a:bodyPr>
+          <a:lstStyle/>
+          <a:p>
+            <a:pPr algn="ctr">
+              <a:lnSpc>
+                <a:spcPct val="100000"/>
+              </a:lnSpc>
+            </a:pPr>
+            <a:r>
+              <a:rPr sz="1200" b="1">
+                <a:solidFill>
+                  <a:srgbClr val="202020"/>
+                </a:solidFill>
+                <a:latin typeface="Microsoft JhengHei"/>
+              </a:rPr>
+              <a:t>分層長期記憶</a:t>
+            </a:r>
+          </a:p>
+        </p:txBody>
+      </p:sp>
+      <p:sp>
+        <p:nvSpPr>
+          <p:cNvPr id="65" name="Rounded Rectangle 64"/>
+          <p:cNvSpPr/>
+          <p:nvPr/>
+        </p:nvSpPr>
+        <p:spPr>
+          <a:xfrm>
+            <a:off x="548640" y="4069079"/>
+            <a:ext cx="3566160" cy="2148840"/>
+          </a:xfrm>
+          <a:prstGeom prst="roundRect">
+            <a:avLst/>
+          </a:prstGeom>
+          <a:solidFill>
+            <a:srgbClr val="D8E7F7"/>
+          </a:solidFill>
+          <a:ln w="12700">
+            <a:solidFill>
+              <a:srgbClr val="2E6DA4"/>
+            </a:solidFill>
+          </a:ln>
+          <a:effectLst/>
+        </p:spPr>
+        <p:style>
+          <a:lnRef idx="1">
+            <a:schemeClr val="accent1"/>
+          </a:lnRef>
+          <a:fillRef idx="3">
+            <a:schemeClr val="accent1"/>
+          </a:fillRef>
+          <a:effectRef idx="2">
+            <a:schemeClr val="accent1"/>
+          </a:effectRef>
+          <a:fontRef idx="minor">
+            <a:schemeClr val="lt1"/>
+          </a:fontRef>
+        </p:style>
+        <p:txBody>
+          <a:bodyPr rtlCol="0" anchor="ctr"/>
+          <a:lstStyle/>
+          <a:p>
+            <a:pPr algn="ctr"/>
+          </a:p>
+        </p:txBody>
+      </p:sp>
+      <p:sp>
+        <p:nvSpPr>
+          <p:cNvPr id="66" name="TextBox 65"/>
+          <p:cNvSpPr txBox="1"/>
+          <p:nvPr/>
+        </p:nvSpPr>
+        <p:spPr>
+          <a:xfrm>
+            <a:off x="685800" y="4133087"/>
+            <a:ext cx="1188720" cy="274320"/>
+          </a:xfrm>
+          <a:prstGeom prst="rect">
+            <a:avLst/>
+          </a:prstGeom>
+          <a:noFill/>
+        </p:spPr>
+        <p:txBody>
+          <a:bodyPr wrap="none" lIns="0" tIns="0">
+            <a:spAutoFit/>
+          </a:bodyPr>
+          <a:lstStyle/>
+          <a:p>
+            <a:r>
+              <a:rPr sz="1000" b="1">
+                <a:solidFill>
+                  <a:srgbClr val="2E6DA4"/>
+                </a:solidFill>
+                <a:latin typeface="Microsoft JhengHei"/>
+              </a:rPr>
+              <a:t>Top </a:t>
+            </a:r>
+            <a:r>
+              <a:rPr i="1" sz="1100" b="1">
+                <a:solidFill>
+                  <a:srgbClr val="2E6DA4"/>
+                </a:solidFill>
+                <a:latin typeface="Times New Roman"/>
+              </a:rPr>
+              <a:t>K</a:t>
+            </a:r>
+          </a:p>
+        </p:txBody>
+      </p:sp>
+      <p:sp>
+        <p:nvSpPr>
+          <p:cNvPr id="67" name="TextBox 66"/>
+          <p:cNvSpPr txBox="1"/>
+          <p:nvPr/>
+        </p:nvSpPr>
+        <p:spPr>
+          <a:xfrm>
+            <a:off x="685800" y="4407407"/>
+            <a:ext cx="3291840" cy="274320"/>
+          </a:xfrm>
+          <a:prstGeom prst="rect">
+            <a:avLst/>
+          </a:prstGeom>
+          <a:noFill/>
+        </p:spPr>
+        <p:txBody>
+          <a:bodyPr wrap="square" lIns="0" tIns="0">
+            <a:spAutoFit/>
+          </a:bodyPr>
+          <a:lstStyle/>
+          <a:p>
+            <a:r>
+              <a:rPr i="1" sz="1100" b="1">
+                <a:solidFill>
+                  <a:srgbClr val="2E6DA4"/>
+                </a:solidFill>
+                <a:latin typeface="Times New Roman"/>
+              </a:rPr>
+              <a:t>Ratio</a:t>
+            </a:r>
+            <a:r>
+              <a:rPr i="1" sz="800" baseline="30000">
+                <a:solidFill>
+                  <a:srgbClr val="2E6DA4"/>
+                </a:solidFill>
+                <a:latin typeface="Microsoft JhengHei"/>
+              </a:rPr>
+              <a:t>淺層</a:t>
+            </a:r>
+            <a:r>
+              <a:rPr i="1" sz="800" baseline="-25000">
+                <a:solidFill>
+                  <a:srgbClr val="2E6DA4"/>
+                </a:solidFill>
+                <a:latin typeface="Microsoft JhengHei"/>
+              </a:rPr>
+              <a:t>衰減</a:t>
+            </a:r>
+          </a:p>
+        </p:txBody>
+      </p:sp>
+      <p:sp>
+        <p:nvSpPr>
+          <p:cNvPr id="68" name="Rounded Rectangle 67"/>
+          <p:cNvSpPr/>
+          <p:nvPr/>
+        </p:nvSpPr>
+        <p:spPr>
+          <a:xfrm>
+            <a:off x="731520" y="4709159"/>
+            <a:ext cx="3200400" cy="822960"/>
+          </a:xfrm>
+          <a:prstGeom prst="roundRect">
+            <a:avLst/>
+          </a:prstGeom>
+          <a:solidFill>
+            <a:srgbClr val="FFFFFF"/>
+          </a:solidFill>
+          <a:ln w="12700">
+            <a:solidFill>
+              <a:srgbClr val="404040"/>
+            </a:solidFill>
+          </a:ln>
+          <a:effectLst/>
+        </p:spPr>
+        <p:style>
+          <a:lnRef idx="1">
+            <a:schemeClr val="accent1"/>
+          </a:lnRef>
+          <a:fillRef idx="3">
+            <a:schemeClr val="accent1"/>
+          </a:fillRef>
+          <a:effectRef idx="2">
+            <a:schemeClr val="accent1"/>
+          </a:effectRef>
+          <a:fontRef idx="minor">
+            <a:schemeClr val="lt1"/>
+          </a:fontRef>
+        </p:style>
+        <p:txBody>
+          <a:bodyPr rtlCol="0" anchor="ctr" wrap="square" lIns="30000" rIns="30000"/>
+          <a:lstStyle/>
+          <a:p>
+            <a:pPr algn="ctr"/>
+            <a:r>
+              <a:rPr sz="850" b="1">
+                <a:solidFill>
+                  <a:srgbClr val="202020"/>
+                </a:solidFill>
+                <a:latin typeface="Microsoft JhengHei"/>
+              </a:rPr>
+              <a:t>每日市場新聞洞見</a:t>
+            </a:r>
+          </a:p>
+        </p:txBody>
+      </p:sp>
+      <p:sp>
+        <p:nvSpPr>
+          <p:cNvPr id="69" name="TextBox 68"/>
+          <p:cNvSpPr txBox="1"/>
+          <p:nvPr/>
+        </p:nvSpPr>
+        <p:spPr>
+          <a:xfrm>
+            <a:off x="548640" y="5623559"/>
+            <a:ext cx="3566160" cy="274320"/>
+          </a:xfrm>
+          <a:prstGeom prst="rect">
+            <a:avLst/>
+          </a:prstGeom>
+          <a:noFill/>
+        </p:spPr>
+        <p:txBody>
+          <a:bodyPr wrap="square" anchor="t" lIns="0" rIns="0" tIns="0" bIns="0">
+            <a:spAutoFit/>
+          </a:bodyPr>
+          <a:lstStyle/>
+          <a:p>
+            <a:pPr algn="ctr">
+              <a:lnSpc>
+                <a:spcPct val="100000"/>
+              </a:lnSpc>
+            </a:pPr>
+            <a:r>
+              <a:rPr sz="1000" b="1">
+                <a:solidFill>
+                  <a:srgbClr val="202020"/>
+                </a:solidFill>
+                <a:latin typeface="Microsoft JhengHei"/>
+              </a:rPr>
+              <a:t>淺層處理層</a:t>
+            </a:r>
+          </a:p>
+        </p:txBody>
+      </p:sp>
+      <p:sp>
+        <p:nvSpPr>
+          <p:cNvPr id="70" name="Rounded Rectangle 69"/>
+          <p:cNvSpPr/>
+          <p:nvPr/>
+        </p:nvSpPr>
+        <p:spPr>
+          <a:xfrm>
+            <a:off x="4434840" y="4069079"/>
+            <a:ext cx="3566160" cy="2148840"/>
+          </a:xfrm>
+          <a:prstGeom prst="roundRect">
+            <a:avLst/>
+          </a:prstGeom>
+          <a:solidFill>
+            <a:srgbClr val="DCF0DC"/>
+          </a:solidFill>
+          <a:ln w="12700">
+            <a:solidFill>
+              <a:srgbClr val="309040"/>
+            </a:solidFill>
+          </a:ln>
+          <a:effectLst/>
+        </p:spPr>
+        <p:style>
+          <a:lnRef idx="1">
+            <a:schemeClr val="accent1"/>
+          </a:lnRef>
+          <a:fillRef idx="3">
+            <a:schemeClr val="accent1"/>
+          </a:fillRef>
+          <a:effectRef idx="2">
+            <a:schemeClr val="accent1"/>
+          </a:effectRef>
+          <a:fontRef idx="minor">
+            <a:schemeClr val="lt1"/>
+          </a:fontRef>
+        </p:style>
+        <p:txBody>
+          <a:bodyPr rtlCol="0" anchor="ctr"/>
+          <a:lstStyle/>
+          <a:p>
+            <a:pPr algn="ctr"/>
+          </a:p>
+        </p:txBody>
+      </p:sp>
+      <p:sp>
+        <p:nvSpPr>
+          <p:cNvPr id="71" name="TextBox 70"/>
+          <p:cNvSpPr txBox="1"/>
+          <p:nvPr/>
+        </p:nvSpPr>
+        <p:spPr>
+          <a:xfrm>
+            <a:off x="4572000" y="4133087"/>
+            <a:ext cx="1188720" cy="274320"/>
+          </a:xfrm>
+          <a:prstGeom prst="rect">
+            <a:avLst/>
+          </a:prstGeom>
+          <a:noFill/>
+        </p:spPr>
+        <p:txBody>
+          <a:bodyPr wrap="none" lIns="0" tIns="0">
+            <a:spAutoFit/>
+          </a:bodyPr>
+          <a:lstStyle/>
+          <a:p>
+            <a:r>
+              <a:rPr sz="1000" b="1">
+                <a:solidFill>
+                  <a:srgbClr val="309040"/>
+                </a:solidFill>
+                <a:latin typeface="Microsoft JhengHei"/>
+              </a:rPr>
+              <a:t>Top </a:t>
+            </a:r>
+            <a:r>
+              <a:rPr i="1" sz="1100" b="1">
+                <a:solidFill>
+                  <a:srgbClr val="309040"/>
+                </a:solidFill>
+                <a:latin typeface="Times New Roman"/>
+              </a:rPr>
+              <a:t>K</a:t>
+            </a:r>
+          </a:p>
+        </p:txBody>
+      </p:sp>
+      <p:sp>
+        <p:nvSpPr>
+          <p:cNvPr id="72" name="TextBox 71"/>
+          <p:cNvSpPr txBox="1"/>
+          <p:nvPr/>
+        </p:nvSpPr>
+        <p:spPr>
+          <a:xfrm>
+            <a:off x="4572000" y="4407407"/>
+            <a:ext cx="3291840" cy="274320"/>
+          </a:xfrm>
+          <a:prstGeom prst="rect">
+            <a:avLst/>
+          </a:prstGeom>
+          <a:noFill/>
+        </p:spPr>
+        <p:txBody>
+          <a:bodyPr wrap="square" lIns="0" tIns="0">
+            <a:spAutoFit/>
+          </a:bodyPr>
+          <a:lstStyle/>
+          <a:p>
+            <a:r>
+              <a:rPr i="1" sz="1100" b="1">
+                <a:solidFill>
+                  <a:srgbClr val="309040"/>
+                </a:solidFill>
+                <a:latin typeface="Times New Roman"/>
+              </a:rPr>
+              <a:t>Ratio</a:t>
+            </a:r>
+            <a:r>
+              <a:rPr i="1" sz="800" baseline="30000">
+                <a:solidFill>
+                  <a:srgbClr val="309040"/>
+                </a:solidFill>
+                <a:latin typeface="Microsoft JhengHei"/>
+              </a:rPr>
+              <a:t>中層</a:t>
+            </a:r>
+            <a:r>
+              <a:rPr i="1" sz="800" baseline="-25000">
+                <a:solidFill>
+                  <a:srgbClr val="309040"/>
+                </a:solidFill>
+                <a:latin typeface="Microsoft JhengHei"/>
+              </a:rPr>
+              <a:t>衰減</a:t>
+            </a:r>
+          </a:p>
+        </p:txBody>
+      </p:sp>
+      <p:sp>
+        <p:nvSpPr>
+          <p:cNvPr id="73" name="Rounded Rectangle 72"/>
+          <p:cNvSpPr/>
+          <p:nvPr/>
+        </p:nvSpPr>
+        <p:spPr>
+          <a:xfrm>
+            <a:off x="4617720" y="4709159"/>
+            <a:ext cx="3200400" cy="822960"/>
+          </a:xfrm>
+          <a:prstGeom prst="roundRect">
+            <a:avLst/>
+          </a:prstGeom>
+          <a:solidFill>
+            <a:srgbClr val="FFFFFF"/>
+          </a:solidFill>
+          <a:ln w="12700">
+            <a:solidFill>
+              <a:srgbClr val="404040"/>
+            </a:solidFill>
+          </a:ln>
+          <a:effectLst/>
+        </p:spPr>
+        <p:style>
+          <a:lnRef idx="1">
+            <a:schemeClr val="accent1"/>
+          </a:lnRef>
+          <a:fillRef idx="3">
+            <a:schemeClr val="accent1"/>
+          </a:fillRef>
+          <a:effectRef idx="2">
+            <a:schemeClr val="accent1"/>
+          </a:effectRef>
+          <a:fontRef idx="minor">
+            <a:schemeClr val="lt1"/>
+          </a:fontRef>
+        </p:style>
+        <p:txBody>
+          <a:bodyPr rtlCol="0" anchor="ctr" wrap="square" lIns="30000" rIns="30000"/>
+          <a:lstStyle/>
+          <a:p>
+            <a:pPr algn="ctr"/>
+            <a:r>
+              <a:rPr sz="850" b="1">
+                <a:solidFill>
+                  <a:srgbClr val="202020"/>
+                </a:solidFill>
+                <a:latin typeface="Microsoft JhengHei"/>
+              </a:rPr>
+              <a:t>公司 10-Q 報告洞見</a:t>
+            </a:r>
+          </a:p>
+        </p:txBody>
+      </p:sp>
+      <p:sp>
+        <p:nvSpPr>
+          <p:cNvPr id="74" name="TextBox 73"/>
+          <p:cNvSpPr txBox="1"/>
+          <p:nvPr/>
+        </p:nvSpPr>
+        <p:spPr>
+          <a:xfrm>
+            <a:off x="4434840" y="5623559"/>
+            <a:ext cx="3566160" cy="274320"/>
+          </a:xfrm>
+          <a:prstGeom prst="rect">
+            <a:avLst/>
+          </a:prstGeom>
+          <a:noFill/>
+        </p:spPr>
+        <p:txBody>
+          <a:bodyPr wrap="square" anchor="t" lIns="0" rIns="0" tIns="0" bIns="0">
+            <a:spAutoFit/>
+          </a:bodyPr>
+          <a:lstStyle/>
+          <a:p>
+            <a:pPr algn="ctr">
+              <a:lnSpc>
+                <a:spcPct val="100000"/>
+              </a:lnSpc>
+            </a:pPr>
+            <a:r>
+              <a:rPr sz="1000" b="1">
+                <a:solidFill>
+                  <a:srgbClr val="202020"/>
+                </a:solidFill>
+                <a:latin typeface="Microsoft JhengHei"/>
+              </a:rPr>
+              <a:t>中層處理層</a:t>
+            </a:r>
+          </a:p>
+        </p:txBody>
+      </p:sp>
+      <p:sp>
+        <p:nvSpPr>
+          <p:cNvPr id="75" name="Rounded Rectangle 74"/>
+          <p:cNvSpPr/>
+          <p:nvPr/>
+        </p:nvSpPr>
+        <p:spPr>
+          <a:xfrm>
+            <a:off x="8321040" y="4069079"/>
+            <a:ext cx="3566160" cy="2148840"/>
+          </a:xfrm>
+          <a:prstGeom prst="roundRect">
+            <a:avLst/>
+          </a:prstGeom>
+          <a:solidFill>
+            <a:srgbClr val="F5E3C8"/>
+          </a:solidFill>
+          <a:ln w="12700">
+            <a:solidFill>
+              <a:srgbClr val="B07020"/>
+            </a:solidFill>
+          </a:ln>
+          <a:effectLst/>
+        </p:spPr>
+        <p:style>
+          <a:lnRef idx="1">
+            <a:schemeClr val="accent1"/>
+          </a:lnRef>
+          <a:fillRef idx="3">
+            <a:schemeClr val="accent1"/>
+          </a:fillRef>
+          <a:effectRef idx="2">
+            <a:schemeClr val="accent1"/>
+          </a:effectRef>
+          <a:fontRef idx="minor">
+            <a:schemeClr val="lt1"/>
+          </a:fontRef>
+        </p:style>
+        <p:txBody>
+          <a:bodyPr rtlCol="0" anchor="ctr"/>
+          <a:lstStyle/>
+          <a:p>
+            <a:pPr algn="ctr"/>
+          </a:p>
+        </p:txBody>
+      </p:sp>
+      <p:sp>
+        <p:nvSpPr>
+          <p:cNvPr id="76" name="TextBox 75"/>
+          <p:cNvSpPr txBox="1"/>
+          <p:nvPr/>
+        </p:nvSpPr>
+        <p:spPr>
+          <a:xfrm>
+            <a:off x="8458200" y="4133087"/>
+            <a:ext cx="1188720" cy="274320"/>
+          </a:xfrm>
+          <a:prstGeom prst="rect">
+            <a:avLst/>
+          </a:prstGeom>
+          <a:noFill/>
+        </p:spPr>
+        <p:txBody>
+          <a:bodyPr wrap="none" lIns="0" tIns="0">
+            <a:spAutoFit/>
+          </a:bodyPr>
+          <a:lstStyle/>
+          <a:p>
+            <a:r>
+              <a:rPr sz="1000" b="1">
+                <a:solidFill>
+                  <a:srgbClr val="B07020"/>
+                </a:solidFill>
+                <a:latin typeface="Microsoft JhengHei"/>
+              </a:rPr>
+              <a:t>Top </a:t>
+            </a:r>
+            <a:r>
+              <a:rPr i="1" sz="1100" b="1">
+                <a:solidFill>
+                  <a:srgbClr val="B07020"/>
+                </a:solidFill>
+                <a:latin typeface="Times New Roman"/>
+              </a:rPr>
+              <a:t>K</a:t>
+            </a:r>
+          </a:p>
+        </p:txBody>
+      </p:sp>
+      <p:sp>
+        <p:nvSpPr>
+          <p:cNvPr id="77" name="TextBox 76"/>
+          <p:cNvSpPr txBox="1"/>
+          <p:nvPr/>
+        </p:nvSpPr>
+        <p:spPr>
+          <a:xfrm>
+            <a:off x="8458200" y="4407407"/>
+            <a:ext cx="3291840" cy="274320"/>
+          </a:xfrm>
+          <a:prstGeom prst="rect">
+            <a:avLst/>
+          </a:prstGeom>
+          <a:noFill/>
+        </p:spPr>
+        <p:txBody>
+          <a:bodyPr wrap="square" lIns="0" tIns="0">
+            <a:spAutoFit/>
+          </a:bodyPr>
+          <a:lstStyle/>
+          <a:p>
+            <a:r>
+              <a:rPr i="1" sz="1100" b="1">
+                <a:solidFill>
+                  <a:srgbClr val="B07020"/>
+                </a:solidFill>
+                <a:latin typeface="Times New Roman"/>
+              </a:rPr>
+              <a:t>Ratio</a:t>
+            </a:r>
+            <a:r>
+              <a:rPr i="1" sz="800" baseline="30000">
+                <a:solidFill>
+                  <a:srgbClr val="B07020"/>
+                </a:solidFill>
+                <a:latin typeface="Microsoft JhengHei"/>
+              </a:rPr>
+              <a:t>深層</a:t>
+            </a:r>
+            <a:r>
+              <a:rPr i="1" sz="800" baseline="-25000">
+                <a:solidFill>
+                  <a:srgbClr val="B07020"/>
+                </a:solidFill>
+                <a:latin typeface="Microsoft JhengHei"/>
+              </a:rPr>
+              <a:t>衰減</a:t>
+            </a:r>
+          </a:p>
+        </p:txBody>
+      </p:sp>
+      <p:sp>
+        <p:nvSpPr>
+          <p:cNvPr id="78" name="Rounded Rectangle 77"/>
+          <p:cNvSpPr/>
+          <p:nvPr/>
+        </p:nvSpPr>
+        <p:spPr>
+          <a:xfrm>
+            <a:off x="8503919" y="4709159"/>
+            <a:ext cx="1554480" cy="822960"/>
+          </a:xfrm>
+          <a:prstGeom prst="roundRect">
+            <a:avLst/>
+          </a:prstGeom>
+          <a:solidFill>
+            <a:srgbClr val="FFFFFF"/>
+          </a:solidFill>
+          <a:ln w="12700">
+            <a:solidFill>
+              <a:srgbClr val="404040"/>
+            </a:solidFill>
+          </a:ln>
+          <a:effectLst/>
+        </p:spPr>
+        <p:style>
+          <a:lnRef idx="1">
+            <a:schemeClr val="accent1"/>
+          </a:lnRef>
+          <a:fillRef idx="3">
+            <a:schemeClr val="accent1"/>
+          </a:fillRef>
+          <a:effectRef idx="2">
+            <a:schemeClr val="accent1"/>
+          </a:effectRef>
+          <a:fontRef idx="minor">
+            <a:schemeClr val="lt1"/>
+          </a:fontRef>
+        </p:style>
+        <p:txBody>
+          <a:bodyPr rtlCol="0" anchor="ctr" wrap="square" lIns="30000" rIns="30000"/>
+          <a:lstStyle/>
+          <a:p>
+            <a:pPr algn="ctr"/>
+            <a:r>
+              <a:rPr sz="850" b="1">
+                <a:solidFill>
+                  <a:srgbClr val="202020"/>
+                </a:solidFill>
+                <a:latin typeface="Microsoft JhengHei"/>
+              </a:rPr>
+              <a:t>延伸反思</a:t>
+            </a:r>
+          </a:p>
+        </p:txBody>
+      </p:sp>
+      <p:sp>
+        <p:nvSpPr>
+          <p:cNvPr id="79" name="Rounded Rectangle 78"/>
+          <p:cNvSpPr/>
+          <p:nvPr/>
+        </p:nvSpPr>
+        <p:spPr>
+          <a:xfrm>
+            <a:off x="10149840" y="4709159"/>
+            <a:ext cx="1554480" cy="822960"/>
+          </a:xfrm>
+          <a:prstGeom prst="roundRect">
+            <a:avLst/>
+          </a:prstGeom>
+          <a:solidFill>
+            <a:srgbClr val="FFFFFF"/>
+          </a:solidFill>
+          <a:ln w="12700">
+            <a:solidFill>
+              <a:srgbClr val="404040"/>
+            </a:solidFill>
+          </a:ln>
+          <a:effectLst/>
+        </p:spPr>
+        <p:style>
+          <a:lnRef idx="1">
+            <a:schemeClr val="accent1"/>
+          </a:lnRef>
+          <a:fillRef idx="3">
+            <a:schemeClr val="accent1"/>
+          </a:fillRef>
+          <a:effectRef idx="2">
+            <a:schemeClr val="accent1"/>
+          </a:effectRef>
+          <a:fontRef idx="minor">
+            <a:schemeClr val="lt1"/>
+          </a:fontRef>
+        </p:style>
+        <p:txBody>
+          <a:bodyPr rtlCol="0" anchor="ctr" wrap="square" lIns="30000" rIns="30000"/>
+          <a:lstStyle/>
+          <a:p>
+            <a:pPr algn="ctr"/>
+            <a:r>
+              <a:rPr sz="850" b="1">
+                <a:solidFill>
+                  <a:srgbClr val="202020"/>
+                </a:solidFill>
+                <a:latin typeface="Microsoft JhengHei"/>
+              </a:rPr>
+              <a:t>公司 10-K 報告洞見</a:t>
+            </a:r>
+          </a:p>
+        </p:txBody>
+      </p:sp>
+      <p:sp>
+        <p:nvSpPr>
+          <p:cNvPr id="80" name="TextBox 79"/>
+          <p:cNvSpPr txBox="1"/>
+          <p:nvPr/>
+        </p:nvSpPr>
+        <p:spPr>
+          <a:xfrm>
+            <a:off x="8321040" y="5623559"/>
+            <a:ext cx="3566160" cy="274320"/>
+          </a:xfrm>
+          <a:prstGeom prst="rect">
+            <a:avLst/>
+          </a:prstGeom>
+          <a:noFill/>
+        </p:spPr>
+        <p:txBody>
+          <a:bodyPr wrap="square" anchor="t" lIns="0" rIns="0" tIns="0" bIns="0">
+            <a:spAutoFit/>
+          </a:bodyPr>
+          <a:lstStyle/>
+          <a:p>
+            <a:pPr algn="ctr">
+              <a:lnSpc>
+                <a:spcPct val="100000"/>
+              </a:lnSpc>
+            </a:pPr>
+            <a:r>
+              <a:rPr sz="1000" b="1">
+                <a:solidFill>
+                  <a:srgbClr val="202020"/>
+                </a:solidFill>
+                <a:latin typeface="Microsoft JhengHei"/>
+              </a:rPr>
+              <a:t>深層處理層</a:t>
+            </a:r>
+          </a:p>
+        </p:txBody>
+      </p:sp>
+      <p:cxnSp>
+        <p:nvCxnSpPr>
+          <p:cNvPr id="81" name="Connector 80"/>
+          <p:cNvCxnSpPr/>
+          <p:nvPr/>
+        </p:nvCxnSpPr>
+        <p:spPr>
+          <a:xfrm flipV="1">
+            <a:off x="2331720" y="3108960"/>
+            <a:ext cx="0" cy="960119"/>
           </a:xfrm>
           <a:prstGeom prst="line">
             <a:avLst/>
           </a:prstGeom>
           <a:ln w="19050">
             <a:solidFill>
-              <a:srgbClr val="D09030"/>
+              <a:srgbClr val="309040"/>
             </a:solidFill>
-            <a:prstDash val="dash"/>
+            <a:tailEnd type="triangle" w="med" len="med"/>
           </a:ln>
         </p:spPr>
         <p:style>
@@ -7849,23 +8958,23 @@
       </p:cxnSp>
       <p:cxnSp>
         <p:nvCxnSpPr>
-          <p:cNvPr id="63" name="Connector 62"/>
+          <p:cNvPr id="82" name="Connector 81"/>
           <p:cNvCxnSpPr/>
           <p:nvPr/>
         </p:nvCxnSpPr>
         <p:spPr>
           <a:xfrm>
-            <a:off x="9646920" y="6217920"/>
-            <a:ext cx="0" cy="365759"/>
+            <a:off x="2331720" y="3108960"/>
+            <a:ext cx="1874520" cy="0"/>
           </a:xfrm>
           <a:prstGeom prst="line">
             <a:avLst/>
           </a:prstGeom>
           <a:ln w="19050">
             <a:solidFill>
-              <a:srgbClr val="D09030"/>
+              <a:srgbClr val="309040"/>
             </a:solidFill>
-            <a:prstDash val="dash"/>
+            <a:tailEnd type="triangle" w="med" len="med"/>
           </a:ln>
         </p:spPr>
         <p:style>
@@ -7885,14 +8994,194 @@
       </p:cxnSp>
       <p:cxnSp>
         <p:nvCxnSpPr>
-          <p:cNvPr id="64" name="Connector 63"/>
+          <p:cNvPr id="83" name="Connector 82"/>
           <p:cNvCxnSpPr/>
           <p:nvPr/>
         </p:nvCxnSpPr>
         <p:spPr>
           <a:xfrm>
-            <a:off x="2331720" y="6583679"/>
-            <a:ext cx="7315200" cy="0"/>
+            <a:off x="4206240" y="3108960"/>
+            <a:ext cx="0" cy="182879"/>
+          </a:xfrm>
+          <a:prstGeom prst="line">
+            <a:avLst/>
+          </a:prstGeom>
+          <a:ln w="19050">
+            <a:solidFill>
+              <a:srgbClr val="309040"/>
+            </a:solidFill>
+            <a:tailEnd type="triangle" w="med" len="med"/>
+          </a:ln>
+        </p:spPr>
+        <p:style>
+          <a:lnRef idx="2">
+            <a:schemeClr val="accent1"/>
+          </a:lnRef>
+          <a:fillRef idx="0">
+            <a:schemeClr val="accent1"/>
+          </a:fillRef>
+          <a:effectRef idx="1">
+            <a:schemeClr val="accent1"/>
+          </a:effectRef>
+          <a:fontRef idx="minor">
+            <a:schemeClr val="tx1"/>
+          </a:fontRef>
+        </p:style>
+      </p:cxnSp>
+      <p:cxnSp>
+        <p:nvCxnSpPr>
+          <p:cNvPr id="84" name="Connector 83"/>
+          <p:cNvCxnSpPr/>
+          <p:nvPr/>
+        </p:nvCxnSpPr>
+        <p:spPr>
+          <a:xfrm flipV="1">
+            <a:off x="6263640" y="3291839"/>
+            <a:ext cx="0" cy="777240"/>
+          </a:xfrm>
+          <a:prstGeom prst="line">
+            <a:avLst/>
+          </a:prstGeom>
+          <a:ln w="19050">
+            <a:solidFill>
+              <a:srgbClr val="309040"/>
+            </a:solidFill>
+            <a:tailEnd type="triangle" w="med" len="med"/>
+          </a:ln>
+        </p:spPr>
+        <p:style>
+          <a:lnRef idx="2">
+            <a:schemeClr val="accent1"/>
+          </a:lnRef>
+          <a:fillRef idx="0">
+            <a:schemeClr val="accent1"/>
+          </a:fillRef>
+          <a:effectRef idx="1">
+            <a:schemeClr val="accent1"/>
+          </a:effectRef>
+          <a:fontRef idx="minor">
+            <a:schemeClr val="tx1"/>
+          </a:fontRef>
+        </p:style>
+      </p:cxnSp>
+      <p:cxnSp>
+        <p:nvCxnSpPr>
+          <p:cNvPr id="85" name="Connector 84"/>
+          <p:cNvCxnSpPr/>
+          <p:nvPr/>
+        </p:nvCxnSpPr>
+        <p:spPr>
+          <a:xfrm flipV="1">
+            <a:off x="9646920" y="3474720"/>
+            <a:ext cx="0" cy="594359"/>
+          </a:xfrm>
+          <a:prstGeom prst="line">
+            <a:avLst/>
+          </a:prstGeom>
+          <a:ln w="19050">
+            <a:solidFill>
+              <a:srgbClr val="8040A0"/>
+            </a:solidFill>
+            <a:tailEnd type="triangle" w="med" len="med"/>
+          </a:ln>
+        </p:spPr>
+        <p:style>
+          <a:lnRef idx="2">
+            <a:schemeClr val="accent1"/>
+          </a:lnRef>
+          <a:fillRef idx="0">
+            <a:schemeClr val="accent1"/>
+          </a:fillRef>
+          <a:effectRef idx="1">
+            <a:schemeClr val="accent1"/>
+          </a:effectRef>
+          <a:fontRef idx="minor">
+            <a:schemeClr val="tx1"/>
+          </a:fontRef>
+        </p:style>
+      </p:cxnSp>
+      <p:cxnSp>
+        <p:nvCxnSpPr>
+          <p:cNvPr id="86" name="Connector 85"/>
+          <p:cNvCxnSpPr/>
+          <p:nvPr/>
+        </p:nvCxnSpPr>
+        <p:spPr>
+          <a:xfrm flipH="1">
+            <a:off x="6126480" y="3474720"/>
+            <a:ext cx="3520440" cy="0"/>
+          </a:xfrm>
+          <a:prstGeom prst="line">
+            <a:avLst/>
+          </a:prstGeom>
+          <a:ln w="19050">
+            <a:solidFill>
+              <a:srgbClr val="8040A0"/>
+            </a:solidFill>
+            <a:tailEnd type="triangle" w="med" len="med"/>
+          </a:ln>
+        </p:spPr>
+        <p:style>
+          <a:lnRef idx="2">
+            <a:schemeClr val="accent1"/>
+          </a:lnRef>
+          <a:fillRef idx="0">
+            <a:schemeClr val="accent1"/>
+          </a:fillRef>
+          <a:effectRef idx="1">
+            <a:schemeClr val="accent1"/>
+          </a:effectRef>
+          <a:fontRef idx="minor">
+            <a:schemeClr val="tx1"/>
+          </a:fontRef>
+        </p:style>
+      </p:cxnSp>
+      <p:cxnSp>
+        <p:nvCxnSpPr>
+          <p:cNvPr id="87" name="Connector 86"/>
+          <p:cNvCxnSpPr/>
+          <p:nvPr/>
+        </p:nvCxnSpPr>
+        <p:spPr>
+          <a:xfrm flipV="1">
+            <a:off x="6126480" y="3291839"/>
+            <a:ext cx="0" cy="182881"/>
+          </a:xfrm>
+          <a:prstGeom prst="line">
+            <a:avLst/>
+          </a:prstGeom>
+          <a:ln w="19050">
+            <a:solidFill>
+              <a:srgbClr val="8040A0"/>
+            </a:solidFill>
+            <a:tailEnd type="triangle" w="med" len="med"/>
+          </a:ln>
+        </p:spPr>
+        <p:style>
+          <a:lnRef idx="2">
+            <a:schemeClr val="accent1"/>
+          </a:lnRef>
+          <a:fillRef idx="0">
+            <a:schemeClr val="accent1"/>
+          </a:fillRef>
+          <a:effectRef idx="1">
+            <a:schemeClr val="accent1"/>
+          </a:effectRef>
+          <a:fontRef idx="minor">
+            <a:schemeClr val="tx1"/>
+          </a:fontRef>
+        </p:style>
+      </p:cxnSp>
+      <p:cxnSp>
+        <p:nvCxnSpPr>
+          <p:cNvPr id="88" name="Connector 87"/>
+          <p:cNvCxnSpPr/>
+          <p:nvPr/>
+        </p:nvCxnSpPr>
+        <p:spPr>
+          <a:xfrm>
+            <a:off x="4114800" y="5120640"/>
+            <a:ext cx="320040" cy="0"/>
           </a:xfrm>
           <a:prstGeom prst="line">
             <a:avLst/>
@@ -7921,7 +9210,267 @@
       </p:cxnSp>
       <p:sp>
         <p:nvSpPr>
-          <p:cNvPr id="65" name="TextBox 64"/>
+          <p:cNvPr id="89" name="TextBox 88"/>
+          <p:cNvSpPr txBox="1"/>
+          <p:nvPr/>
+        </p:nvSpPr>
+        <p:spPr>
+          <a:xfrm>
+            <a:off x="3954780" y="4919472"/>
+            <a:ext cx="640080" cy="402336"/>
+          </a:xfrm>
+          <a:prstGeom prst="rect">
+            <a:avLst/>
+          </a:prstGeom>
+          <a:noFill/>
+        </p:spPr>
+        <p:txBody>
+          <a:bodyPr wrap="square" anchor="t" lIns="0" rIns="0" tIns="0" bIns="0">
+            <a:spAutoFit/>
+          </a:bodyPr>
+          <a:lstStyle/>
+          <a:p>
+            <a:pPr algn="ctr">
+              <a:lnSpc>
+                <a:spcPct val="100000"/>
+              </a:lnSpc>
+            </a:pPr>
+            <a:r>
+              <a:rPr sz="650" b="1">
+                <a:solidFill>
+                  <a:srgbClr val="B07820"/>
+                </a:solidFill>
+                <a:latin typeface="Microsoft JhengHei"/>
+              </a:rPr>
+              <a:t>存取
+計數器</a:t>
+            </a:r>
+          </a:p>
+        </p:txBody>
+      </p:sp>
+      <p:cxnSp>
+        <p:nvCxnSpPr>
+          <p:cNvPr id="90" name="Connector 89"/>
+          <p:cNvCxnSpPr/>
+          <p:nvPr/>
+        </p:nvCxnSpPr>
+        <p:spPr>
+          <a:xfrm>
+            <a:off x="8001000" y="5120640"/>
+            <a:ext cx="320040" cy="0"/>
+          </a:xfrm>
+          <a:prstGeom prst="line">
+            <a:avLst/>
+          </a:prstGeom>
+          <a:ln w="19050">
+            <a:solidFill>
+              <a:srgbClr val="D09030"/>
+            </a:solidFill>
+            <a:prstDash val="dash"/>
+          </a:ln>
+        </p:spPr>
+        <p:style>
+          <a:lnRef idx="2">
+            <a:schemeClr val="accent1"/>
+          </a:lnRef>
+          <a:fillRef idx="0">
+            <a:schemeClr val="accent1"/>
+          </a:fillRef>
+          <a:effectRef idx="1">
+            <a:schemeClr val="accent1"/>
+          </a:effectRef>
+          <a:fontRef idx="minor">
+            <a:schemeClr val="tx1"/>
+          </a:fontRef>
+        </p:style>
+      </p:cxnSp>
+      <p:sp>
+        <p:nvSpPr>
+          <p:cNvPr id="91" name="TextBox 90"/>
+          <p:cNvSpPr txBox="1"/>
+          <p:nvPr/>
+        </p:nvSpPr>
+        <p:spPr>
+          <a:xfrm>
+            <a:off x="7840979" y="4919472"/>
+            <a:ext cx="640080" cy="402336"/>
+          </a:xfrm>
+          <a:prstGeom prst="rect">
+            <a:avLst/>
+          </a:prstGeom>
+          <a:noFill/>
+        </p:spPr>
+        <p:txBody>
+          <a:bodyPr wrap="square" anchor="t" lIns="0" rIns="0" tIns="0" bIns="0">
+            <a:spAutoFit/>
+          </a:bodyPr>
+          <a:lstStyle/>
+          <a:p>
+            <a:pPr algn="ctr">
+              <a:lnSpc>
+                <a:spcPct val="100000"/>
+              </a:lnSpc>
+            </a:pPr>
+            <a:r>
+              <a:rPr sz="650" b="1">
+                <a:solidFill>
+                  <a:srgbClr val="B07820"/>
+                </a:solidFill>
+                <a:latin typeface="Microsoft JhengHei"/>
+              </a:rPr>
+              <a:t>存取
+計數器</a:t>
+            </a:r>
+          </a:p>
+        </p:txBody>
+      </p:sp>
+      <p:cxnSp>
+        <p:nvCxnSpPr>
+          <p:cNvPr id="92" name="Connector 91"/>
+          <p:cNvCxnSpPr/>
+          <p:nvPr/>
+        </p:nvCxnSpPr>
+        <p:spPr>
+          <a:xfrm>
+            <a:off x="2331720" y="6217920"/>
+            <a:ext cx="0" cy="365759"/>
+          </a:xfrm>
+          <a:prstGeom prst="line">
+            <a:avLst/>
+          </a:prstGeom>
+          <a:ln w="19050">
+            <a:solidFill>
+              <a:srgbClr val="D09030"/>
+            </a:solidFill>
+            <a:prstDash val="dash"/>
+          </a:ln>
+        </p:spPr>
+        <p:style>
+          <a:lnRef idx="2">
+            <a:schemeClr val="accent1"/>
+          </a:lnRef>
+          <a:fillRef idx="0">
+            <a:schemeClr val="accent1"/>
+          </a:fillRef>
+          <a:effectRef idx="1">
+            <a:schemeClr val="accent1"/>
+          </a:effectRef>
+          <a:fontRef idx="minor">
+            <a:schemeClr val="tx1"/>
+          </a:fontRef>
+        </p:style>
+      </p:cxnSp>
+      <p:cxnSp>
+        <p:nvCxnSpPr>
+          <p:cNvPr id="93" name="Connector 92"/>
+          <p:cNvCxnSpPr/>
+          <p:nvPr/>
+        </p:nvCxnSpPr>
+        <p:spPr>
+          <a:xfrm>
+            <a:off x="6263640" y="6217920"/>
+            <a:ext cx="0" cy="365759"/>
+          </a:xfrm>
+          <a:prstGeom prst="line">
+            <a:avLst/>
+          </a:prstGeom>
+          <a:ln w="19050">
+            <a:solidFill>
+              <a:srgbClr val="D09030"/>
+            </a:solidFill>
+            <a:prstDash val="dash"/>
+          </a:ln>
+        </p:spPr>
+        <p:style>
+          <a:lnRef idx="2">
+            <a:schemeClr val="accent1"/>
+          </a:lnRef>
+          <a:fillRef idx="0">
+            <a:schemeClr val="accent1"/>
+          </a:fillRef>
+          <a:effectRef idx="1">
+            <a:schemeClr val="accent1"/>
+          </a:effectRef>
+          <a:fontRef idx="minor">
+            <a:schemeClr val="tx1"/>
+          </a:fontRef>
+        </p:style>
+      </p:cxnSp>
+      <p:cxnSp>
+        <p:nvCxnSpPr>
+          <p:cNvPr id="94" name="Connector 93"/>
+          <p:cNvCxnSpPr/>
+          <p:nvPr/>
+        </p:nvCxnSpPr>
+        <p:spPr>
+          <a:xfrm>
+            <a:off x="9646920" y="6217920"/>
+            <a:ext cx="0" cy="365759"/>
+          </a:xfrm>
+          <a:prstGeom prst="line">
+            <a:avLst/>
+          </a:prstGeom>
+          <a:ln w="19050">
+            <a:solidFill>
+              <a:srgbClr val="D09030"/>
+            </a:solidFill>
+            <a:prstDash val="dash"/>
+          </a:ln>
+        </p:spPr>
+        <p:style>
+          <a:lnRef idx="2">
+            <a:schemeClr val="accent1"/>
+          </a:lnRef>
+          <a:fillRef idx="0">
+            <a:schemeClr val="accent1"/>
+          </a:fillRef>
+          <a:effectRef idx="1">
+            <a:schemeClr val="accent1"/>
+          </a:effectRef>
+          <a:fontRef idx="minor">
+            <a:schemeClr val="tx1"/>
+          </a:fontRef>
+        </p:style>
+      </p:cxnSp>
+      <p:cxnSp>
+        <p:nvCxnSpPr>
+          <p:cNvPr id="95" name="Connector 94"/>
+          <p:cNvCxnSpPr/>
+          <p:nvPr/>
+        </p:nvCxnSpPr>
+        <p:spPr>
+          <a:xfrm>
+            <a:off x="2331720" y="6583679"/>
+            <a:ext cx="7315200" cy="0"/>
+          </a:xfrm>
+          <a:prstGeom prst="line">
+            <a:avLst/>
+          </a:prstGeom>
+          <a:ln w="19050">
+            <a:solidFill>
+              <a:srgbClr val="D09030"/>
+            </a:solidFill>
+            <a:prstDash val="dash"/>
+          </a:ln>
+        </p:spPr>
+        <p:style>
+          <a:lnRef idx="2">
+            <a:schemeClr val="accent1"/>
+          </a:lnRef>
+          <a:fillRef idx="0">
+            <a:schemeClr val="accent1"/>
+          </a:fillRef>
+          <a:effectRef idx="1">
+            <a:schemeClr val="accent1"/>
+          </a:effectRef>
+          <a:fontRef idx="minor">
+            <a:schemeClr val="tx1"/>
+          </a:fontRef>
+        </p:style>
+      </p:cxnSp>
+      <p:sp>
+        <p:nvSpPr>
+          <p:cNvPr id="96" name="TextBox 95"/>
           <p:cNvSpPr txBox="1"/>
           <p:nvPr/>
         </p:nvSpPr>
@@ -7985,7 +9534,7 @@
         <p:spPr>
           <a:xfrm>
             <a:off x="182880" y="91440"/>
-            <a:ext cx="7315200" cy="320040"/>
+            <a:ext cx="914400" cy="320040"/>
           </a:xfrm>
           <a:prstGeom prst="rect">
             <a:avLst/>
@@ -8010,39 +9559,153 @@
                 </a:solidFill>
                 <a:latin typeface="Microsoft JhengHei"/>
               </a:rPr>
-              <a:t>LLMs　　</a:t>
-            </a:r>
-            <a:r>
-              <a:rPr sz="1200" b="1">
-                <a:solidFill>
-                  <a:srgbClr val="202020"/>
-                </a:solidFill>
-                <a:latin typeface="Microsoft JhengHei"/>
-              </a:rPr>
-              <a:t>股票代號: </a:t>
-            </a:r>
-            <a:r>
-              <a:rPr sz="1200" b="0">
-                <a:solidFill>
-                  <a:srgbClr val="202020"/>
-                </a:solidFill>
-                <a:latin typeface="Microsoft JhengHei"/>
-              </a:rPr>
-              <a:t>TSLA</a:t>
-            </a:r>
-          </a:p>
-        </p:txBody>
-      </p:sp>
-      <p:sp>
-        <p:nvSpPr>
-          <p:cNvPr id="3" name="TextBox 2"/>
+              <a:t>LLMs</a:t>
+            </a:r>
+          </a:p>
+        </p:txBody>
+      </p:sp>
+      <p:sp>
+        <p:nvSpPr>
+          <p:cNvPr id="3" name="Oval 2"/>
+          <p:cNvSpPr/>
+          <p:nvPr/>
+        </p:nvSpPr>
+        <p:spPr>
+          <a:xfrm>
+            <a:off x="777240" y="118872"/>
+            <a:ext cx="201168" cy="201168"/>
+          </a:xfrm>
+          <a:prstGeom prst="ellipse">
+            <a:avLst/>
+          </a:prstGeom>
+          <a:solidFill>
+            <a:srgbClr val="6090C0"/>
+          </a:solidFill>
+          <a:ln>
+            <a:noFill/>
+          </a:ln>
+          <a:effectLst/>
+        </p:spPr>
+        <p:style>
+          <a:lnRef idx="1">
+            <a:schemeClr val="accent1"/>
+          </a:lnRef>
+          <a:fillRef idx="3">
+            <a:schemeClr val="accent1"/>
+          </a:fillRef>
+          <a:effectRef idx="2">
+            <a:schemeClr val="accent1"/>
+          </a:effectRef>
+          <a:fontRef idx="minor">
+            <a:schemeClr val="lt1"/>
+          </a:fontRef>
+        </p:style>
+        <p:txBody>
+          <a:bodyPr rtlCol="0" anchor="ctr"/>
+          <a:lstStyle/>
+          <a:p>
+            <a:pPr algn="ctr"/>
+          </a:p>
+        </p:txBody>
+      </p:sp>
+      <p:sp>
+        <p:nvSpPr>
+          <p:cNvPr id="4" name="Oval 3"/>
+          <p:cNvSpPr/>
+          <p:nvPr/>
+        </p:nvSpPr>
+        <p:spPr>
+          <a:xfrm>
+            <a:off x="1051560" y="118872"/>
+            <a:ext cx="201168" cy="201168"/>
+          </a:xfrm>
+          <a:prstGeom prst="ellipse">
+            <a:avLst/>
+          </a:prstGeom>
+          <a:solidFill>
+            <a:srgbClr val="60A070"/>
+          </a:solidFill>
+          <a:ln>
+            <a:noFill/>
+          </a:ln>
+          <a:effectLst/>
+        </p:spPr>
+        <p:style>
+          <a:lnRef idx="1">
+            <a:schemeClr val="accent1"/>
+          </a:lnRef>
+          <a:fillRef idx="3">
+            <a:schemeClr val="accent1"/>
+          </a:fillRef>
+          <a:effectRef idx="2">
+            <a:schemeClr val="accent1"/>
+          </a:effectRef>
+          <a:fontRef idx="minor">
+            <a:schemeClr val="lt1"/>
+          </a:fontRef>
+        </p:style>
+        <p:txBody>
+          <a:bodyPr rtlCol="0" anchor="ctr"/>
+          <a:lstStyle/>
+          <a:p>
+            <a:pPr algn="ctr"/>
+          </a:p>
+        </p:txBody>
+      </p:sp>
+      <p:sp>
+        <p:nvSpPr>
+          <p:cNvPr id="5" name="Oval 4"/>
+          <p:cNvSpPr/>
+          <p:nvPr/>
+        </p:nvSpPr>
+        <p:spPr>
+          <a:xfrm>
+            <a:off x="1325880" y="118872"/>
+            <a:ext cx="201168" cy="201168"/>
+          </a:xfrm>
+          <a:prstGeom prst="ellipse">
+            <a:avLst/>
+          </a:prstGeom>
+          <a:solidFill>
+            <a:srgbClr val="C09050"/>
+          </a:solidFill>
+          <a:ln>
+            <a:noFill/>
+          </a:ln>
+          <a:effectLst/>
+        </p:spPr>
+        <p:style>
+          <a:lnRef idx="1">
+            <a:schemeClr val="accent1"/>
+          </a:lnRef>
+          <a:fillRef idx="3">
+            <a:schemeClr val="accent1"/>
+          </a:fillRef>
+          <a:effectRef idx="2">
+            <a:schemeClr val="accent1"/>
+          </a:effectRef>
+          <a:fontRef idx="minor">
+            <a:schemeClr val="lt1"/>
+          </a:fontRef>
+        </p:style>
+        <p:txBody>
+          <a:bodyPr rtlCol="0" anchor="ctr"/>
+          <a:lstStyle/>
+          <a:p>
+            <a:pPr algn="ctr"/>
+          </a:p>
+        </p:txBody>
+      </p:sp>
+      <p:sp>
+        <p:nvSpPr>
+          <p:cNvPr id="6" name="TextBox 5"/>
           <p:cNvSpPr txBox="1"/>
           <p:nvPr/>
         </p:nvSpPr>
         <p:spPr>
           <a:xfrm>
-            <a:off x="7498079" y="91440"/>
-            <a:ext cx="4206240" cy="320040"/>
+            <a:off x="1783080" y="91440"/>
+            <a:ext cx="5486400" cy="320040"/>
           </a:xfrm>
           <a:prstGeom prst="rect">
             <a:avLst/>
@@ -8067,6 +9730,54 @@
                 </a:solidFill>
                 <a:latin typeface="Microsoft JhengHei"/>
               </a:rPr>
+              <a:t>股票代號: </a:t>
+            </a:r>
+            <a:r>
+              <a:rPr sz="1200" b="0">
+                <a:solidFill>
+                  <a:srgbClr val="202020"/>
+                </a:solidFill>
+                <a:latin typeface="Microsoft JhengHei"/>
+              </a:rPr>
+              <a:t>TSLA</a:t>
+            </a:r>
+          </a:p>
+        </p:txBody>
+      </p:sp>
+      <p:sp>
+        <p:nvSpPr>
+          <p:cNvPr id="7" name="TextBox 6"/>
+          <p:cNvSpPr txBox="1"/>
+          <p:nvPr/>
+        </p:nvSpPr>
+        <p:spPr>
+          <a:xfrm>
+            <a:off x="7498079" y="91440"/>
+            <a:ext cx="4206240" cy="320040"/>
+          </a:xfrm>
+          <a:prstGeom prst="rect">
+            <a:avLst/>
+          </a:prstGeom>
+          <a:noFill/>
+        </p:spPr>
+        <p:txBody>
+          <a:bodyPr wrap="square" anchor="t" lIns="0" rIns="0" tIns="0" bIns="0">
+            <a:spAutoFit/>
+          </a:bodyPr>
+          <a:lstStyle/>
+          <a:p>
+            <a:pPr algn="l">
+              <a:lnSpc>
+                <a:spcPct val="100000"/>
+              </a:lnSpc>
+            </a:pPr>
+            <a:r>
+              <a:rPr sz="1200" b="1">
+                <a:solidFill>
+                  <a:srgbClr val="202020"/>
+                </a:solidFill>
+                <a:latin typeface="Microsoft JhengHei"/>
+              </a:rPr>
               <a:t>目前日期: </a:t>
             </a:r>
             <a:r>
@@ -8101,7 +9812,7 @@
       </p:sp>
       <p:sp>
         <p:nvSpPr>
-          <p:cNvPr id="4" name="Rounded Rectangle 3"/>
+          <p:cNvPr id="8" name="Rounded Rectangle 7"/>
           <p:cNvSpPr/>
           <p:nvPr/>
         </p:nvSpPr>
@@ -8148,7 +9859,7 @@
       </p:sp>
       <p:sp>
         <p:nvSpPr>
-          <p:cNvPr id="5" name="TextBox 4"/>
+          <p:cNvPr id="9" name="TextBox 8"/>
           <p:cNvSpPr txBox="1"/>
           <p:nvPr/>
         </p:nvSpPr>
@@ -8187,7 +9898,7 @@
       </p:sp>
       <p:sp>
         <p:nvSpPr>
-          <p:cNvPr id="6" name="Rounded Rectangle 5"/>
+          <p:cNvPr id="10" name="Rounded Rectangle 9"/>
           <p:cNvSpPr/>
           <p:nvPr/>
         </p:nvSpPr>
@@ -8233,7 +9944,7 @@
       </p:sp>
       <p:sp>
         <p:nvSpPr>
-          <p:cNvPr id="7" name="TextBox 6"/>
+          <p:cNvPr id="11" name="TextBox 10"/>
           <p:cNvSpPr txBox="1"/>
           <p:nvPr/>
         </p:nvSpPr>
@@ -8338,7 +10049,7 @@
       </p:sp>
       <p:sp>
         <p:nvSpPr>
-          <p:cNvPr id="8" name="TextBox 7"/>
+          <p:cNvPr id="12" name="TextBox 11"/>
           <p:cNvSpPr txBox="1"/>
           <p:nvPr/>
         </p:nvSpPr>
@@ -8377,7 +10088,7 @@
       </p:sp>
       <p:sp>
         <p:nvSpPr>
-          <p:cNvPr id="9" name="Rounded Rectangle 8"/>
+          <p:cNvPr id="13" name="Rounded Rectangle 12"/>
           <p:cNvSpPr/>
           <p:nvPr/>
         </p:nvSpPr>
@@ -8423,7 +10134,7 @@
       </p:sp>
       <p:sp>
         <p:nvSpPr>
-          <p:cNvPr id="10" name="TextBox 9"/>
+          <p:cNvPr id="14" name="TextBox 13"/>
           <p:cNvSpPr txBox="1"/>
           <p:nvPr/>
         </p:nvSpPr>
@@ -8462,7 +10173,7 @@
       </p:sp>
       <p:sp>
         <p:nvSpPr>
-          <p:cNvPr id="11" name="Rounded Rectangle 10"/>
+          <p:cNvPr id="15" name="Rounded Rectangle 14"/>
           <p:cNvSpPr/>
           <p:nvPr/>
         </p:nvSpPr>
@@ -8499,10 +10210,128 @@
           </a:fontRef>
         </p:style>
         <p:txBody>
-          <a:bodyPr rtlCol="0" anchor="ctr" wrap="square" lIns="30000" rIns="30000"/>
+          <a:bodyPr rtlCol="0" anchor="ctr"/>
           <a:lstStyle/>
           <a:p>
             <a:pPr algn="ctr"/>
+          </a:p>
+        </p:txBody>
+      </p:sp>
+      <p:sp>
+        <p:nvSpPr>
+          <p:cNvPr id="16" name="Oval 15"/>
+          <p:cNvSpPr/>
+          <p:nvPr/>
+        </p:nvSpPr>
+        <p:spPr>
+          <a:xfrm>
+            <a:off x="618134" y="3218687"/>
+            <a:ext cx="117043" cy="117043"/>
+          </a:xfrm>
+          <a:prstGeom prst="ellipse">
+            <a:avLst/>
+          </a:prstGeom>
+          <a:solidFill>
+            <a:srgbClr val="B05050"/>
+          </a:solidFill>
+          <a:ln>
+            <a:noFill/>
+          </a:ln>
+          <a:effectLst/>
+        </p:spPr>
+        <p:style>
+          <a:lnRef idx="1">
+            <a:schemeClr val="accent1"/>
+          </a:lnRef>
+          <a:fillRef idx="3">
+            <a:schemeClr val="accent1"/>
+          </a:fillRef>
+          <a:effectRef idx="2">
+            <a:schemeClr val="accent1"/>
+          </a:effectRef>
+          <a:fontRef idx="minor">
+            <a:schemeClr val="lt1"/>
+          </a:fontRef>
+        </p:style>
+        <p:txBody>
+          <a:bodyPr rtlCol="0" anchor="ctr"/>
+          <a:lstStyle/>
+          <a:p>
+            <a:pPr algn="ctr"/>
+          </a:p>
+        </p:txBody>
+      </p:sp>
+      <p:sp>
+        <p:nvSpPr>
+          <p:cNvPr id="17" name="Trapezoid 16"/>
+          <p:cNvSpPr/>
+          <p:nvPr/>
+        </p:nvSpPr>
+        <p:spPr>
+          <a:xfrm>
+            <a:off x="556686" y="3314663"/>
+            <a:ext cx="239938" cy="140451"/>
+          </a:xfrm>
+          <a:prstGeom prst="trapezoid">
+            <a:avLst/>
+          </a:prstGeom>
+          <a:solidFill>
+            <a:srgbClr val="B05050"/>
+          </a:solidFill>
+          <a:ln>
+            <a:noFill/>
+          </a:ln>
+          <a:effectLst/>
+        </p:spPr>
+        <p:style>
+          <a:lnRef idx="1">
+            <a:schemeClr val="accent1"/>
+          </a:lnRef>
+          <a:fillRef idx="3">
+            <a:schemeClr val="accent1"/>
+          </a:fillRef>
+          <a:effectRef idx="2">
+            <a:schemeClr val="accent1"/>
+          </a:effectRef>
+          <a:fontRef idx="minor">
+            <a:schemeClr val="lt1"/>
+          </a:fontRef>
+        </p:style>
+        <p:txBody>
+          <a:bodyPr rtlCol="0" anchor="ctr"/>
+          <a:lstStyle/>
+          <a:p>
+            <a:pPr algn="ctr"/>
+          </a:p>
+        </p:txBody>
+      </p:sp>
+      <p:sp>
+        <p:nvSpPr>
+          <p:cNvPr id="18" name="TextBox 17"/>
+          <p:cNvSpPr txBox="1"/>
+          <p:nvPr/>
+        </p:nvSpPr>
+        <p:spPr>
+          <a:xfrm>
+            <a:off x="914400" y="3200400"/>
+            <a:ext cx="3017520" cy="365760"/>
+          </a:xfrm>
+          <a:prstGeom prst="rect">
+            <a:avLst/>
+          </a:prstGeom>
+          <a:noFill/>
+        </p:spPr>
+        <p:txBody>
+          <a:bodyPr wrap="square" anchor="ctr" lIns="0" rIns="0" tIns="0" bIns="0">
+            <a:spAutoFit/>
+          </a:bodyPr>
+          <a:lstStyle/>
+          <a:p>
+            <a:pPr algn="ctr">
+              <a:lnSpc>
+                <a:spcPct val="100000"/>
+              </a:lnSpc>
+            </a:pPr>
             <a:r>
               <a:rPr sz="950" b="1">
                 <a:solidFill>
@@ -8517,7 +10346,7 @@
       </p:sp>
       <p:sp>
         <p:nvSpPr>
-          <p:cNvPr id="12" name="Rounded Rectangle 11"/>
+          <p:cNvPr id="19" name="Rounded Rectangle 18"/>
           <p:cNvSpPr/>
           <p:nvPr/>
         </p:nvSpPr>
@@ -8563,7 +10392,7 @@
       </p:sp>
       <p:sp>
         <p:nvSpPr>
-          <p:cNvPr id="13" name="TextBox 12"/>
+          <p:cNvPr id="20" name="TextBox 19"/>
           <p:cNvSpPr txBox="1"/>
           <p:nvPr/>
         </p:nvSpPr>
@@ -8666,7 +10495,7 @@
       </p:sp>
       <p:sp>
         <p:nvSpPr>
-          <p:cNvPr id="14" name="Rounded Rectangle 13"/>
+          <p:cNvPr id="21" name="Rounded Rectangle 20"/>
           <p:cNvSpPr/>
           <p:nvPr/>
         </p:nvSpPr>
@@ -8703,10 +10532,128 @@
           </a:fontRef>
         </p:style>
         <p:txBody>
-          <a:bodyPr rtlCol="0" anchor="ctr" wrap="square" lIns="30000" rIns="30000"/>
+          <a:bodyPr rtlCol="0" anchor="ctr"/>
           <a:lstStyle/>
           <a:p>
             <a:pPr algn="ctr"/>
+          </a:p>
+        </p:txBody>
+      </p:sp>
+      <p:sp>
+        <p:nvSpPr>
+          <p:cNvPr id="22" name="Oval 21"/>
+          <p:cNvSpPr/>
+          <p:nvPr/>
+        </p:nvSpPr>
+        <p:spPr>
+          <a:xfrm>
+            <a:off x="4321454" y="3218687"/>
+            <a:ext cx="117043" cy="117043"/>
+          </a:xfrm>
+          <a:prstGeom prst="ellipse">
+            <a:avLst/>
+          </a:prstGeom>
+          <a:solidFill>
+            <a:srgbClr val="8040A0"/>
+          </a:solidFill>
+          <a:ln>
+            <a:noFill/>
+          </a:ln>
+          <a:effectLst/>
+        </p:spPr>
+        <p:style>
+          <a:lnRef idx="1">
+            <a:schemeClr val="accent1"/>
+          </a:lnRef>
+          <a:fillRef idx="3">
+            <a:schemeClr val="accent1"/>
+          </a:fillRef>
+          <a:effectRef idx="2">
+            <a:schemeClr val="accent1"/>
+          </a:effectRef>
+          <a:fontRef idx="minor">
+            <a:schemeClr val="lt1"/>
+          </a:fontRef>
+        </p:style>
+        <p:txBody>
+          <a:bodyPr rtlCol="0" anchor="ctr"/>
+          <a:lstStyle/>
+          <a:p>
+            <a:pPr algn="ctr"/>
+          </a:p>
+        </p:txBody>
+      </p:sp>
+      <p:sp>
+        <p:nvSpPr>
+          <p:cNvPr id="23" name="Trapezoid 22"/>
+          <p:cNvSpPr/>
+          <p:nvPr/>
+        </p:nvSpPr>
+        <p:spPr>
+          <a:xfrm>
+            <a:off x="4260006" y="3314663"/>
+            <a:ext cx="239938" cy="140451"/>
+          </a:xfrm>
+          <a:prstGeom prst="trapezoid">
+            <a:avLst/>
+          </a:prstGeom>
+          <a:solidFill>
+            <a:srgbClr val="8040A0"/>
+          </a:solidFill>
+          <a:ln>
+            <a:noFill/>
+          </a:ln>
+          <a:effectLst/>
+        </p:spPr>
+        <p:style>
+          <a:lnRef idx="1">
+            <a:schemeClr val="accent1"/>
+          </a:lnRef>
+          <a:fillRef idx="3">
+            <a:schemeClr val="accent1"/>
+          </a:fillRef>
+          <a:effectRef idx="2">
+            <a:schemeClr val="accent1"/>
+          </a:effectRef>
+          <a:fontRef idx="minor">
+            <a:schemeClr val="lt1"/>
+          </a:fontRef>
+        </p:style>
+        <p:txBody>
+          <a:bodyPr rtlCol="0" anchor="ctr"/>
+          <a:lstStyle/>
+          <a:p>
+            <a:pPr algn="ctr"/>
+          </a:p>
+        </p:txBody>
+      </p:sp>
+      <p:sp>
+        <p:nvSpPr>
+          <p:cNvPr id="24" name="TextBox 23"/>
+          <p:cNvSpPr txBox="1"/>
+          <p:nvPr/>
+        </p:nvSpPr>
+        <p:spPr>
+          <a:xfrm>
+            <a:off x="4617720" y="3200400"/>
+            <a:ext cx="3017520" cy="365760"/>
+          </a:xfrm>
+          <a:prstGeom prst="rect">
+            <a:avLst/>
+          </a:prstGeom>
+          <a:noFill/>
+        </p:spPr>
+        <p:txBody>
+          <a:bodyPr wrap="square" anchor="ctr" lIns="0" rIns="0" tIns="0" bIns="0">
+            <a:spAutoFit/>
+          </a:bodyPr>
+          <a:lstStyle/>
+          <a:p>
+            <a:pPr algn="ctr">
+              <a:lnSpc>
+                <a:spcPct val="100000"/>
+              </a:lnSpc>
+            </a:pPr>
             <a:r>
               <a:rPr sz="950" b="1">
                 <a:solidFill>
@@ -8721,7 +10668,7 @@
       </p:sp>
       <p:sp>
         <p:nvSpPr>
-          <p:cNvPr id="15" name="Rounded Rectangle 14"/>
+          <p:cNvPr id="25" name="Rounded Rectangle 24"/>
           <p:cNvSpPr/>
           <p:nvPr/>
         </p:nvSpPr>
@@ -8767,7 +10714,7 @@
       </p:sp>
       <p:sp>
         <p:nvSpPr>
-          <p:cNvPr id="16" name="TextBox 15"/>
+          <p:cNvPr id="26" name="TextBox 25"/>
           <p:cNvSpPr txBox="1"/>
           <p:nvPr/>
         </p:nvSpPr>
@@ -8838,7 +10785,7 @@
       </p:sp>
       <p:sp>
         <p:nvSpPr>
-          <p:cNvPr id="17" name="Rounded Rectangle 16"/>
+          <p:cNvPr id="27" name="Rounded Rectangle 26"/>
           <p:cNvSpPr/>
           <p:nvPr/>
         </p:nvSpPr>
@@ -8875,10 +10822,128 @@
           </a:fontRef>
         </p:style>
         <p:txBody>
-          <a:bodyPr rtlCol="0" anchor="ctr" wrap="square" lIns="30000" rIns="30000"/>
+          <a:bodyPr rtlCol="0" anchor="ctr"/>
           <a:lstStyle/>
           <a:p>
             <a:pPr algn="ctr"/>
+          </a:p>
+        </p:txBody>
+      </p:sp>
+      <p:sp>
+        <p:nvSpPr>
+          <p:cNvPr id="28" name="Oval 27"/>
+          <p:cNvSpPr/>
+          <p:nvPr/>
+        </p:nvSpPr>
+        <p:spPr>
+          <a:xfrm>
+            <a:off x="8024774" y="3218687"/>
+            <a:ext cx="117043" cy="117043"/>
+          </a:xfrm>
+          <a:prstGeom prst="ellipse">
+            <a:avLst/>
+          </a:prstGeom>
+          <a:solidFill>
+            <a:srgbClr val="2E6DA4"/>
+          </a:solidFill>
+          <a:ln>
+            <a:noFill/>
+          </a:ln>
+          <a:effectLst/>
+        </p:spPr>
+        <p:style>
+          <a:lnRef idx="1">
+            <a:schemeClr val="accent1"/>
+          </a:lnRef>
+          <a:fillRef idx="3">
+            <a:schemeClr val="accent1"/>
+          </a:fillRef>
+          <a:effectRef idx="2">
+            <a:schemeClr val="accent1"/>
+          </a:effectRef>
+          <a:fontRef idx="minor">
+            <a:schemeClr val="lt1"/>
+          </a:fontRef>
+        </p:style>
+        <p:txBody>
+          <a:bodyPr rtlCol="0" anchor="ctr"/>
+          <a:lstStyle/>
+          <a:p>
+            <a:pPr algn="ctr"/>
+          </a:p>
+        </p:txBody>
+      </p:sp>
+      <p:sp>
+        <p:nvSpPr>
+          <p:cNvPr id="29" name="Trapezoid 28"/>
+          <p:cNvSpPr/>
+          <p:nvPr/>
+        </p:nvSpPr>
+        <p:spPr>
+          <a:xfrm>
+            <a:off x="7963326" y="3314663"/>
+            <a:ext cx="239938" cy="140451"/>
+          </a:xfrm>
+          <a:prstGeom prst="trapezoid">
+            <a:avLst/>
+          </a:prstGeom>
+          <a:solidFill>
+            <a:srgbClr val="2E6DA4"/>
+          </a:solidFill>
+          <a:ln>
+            <a:noFill/>
+          </a:ln>
+          <a:effectLst/>
+        </p:spPr>
+        <p:style>
+          <a:lnRef idx="1">
+            <a:schemeClr val="accent1"/>
+          </a:lnRef>
+          <a:fillRef idx="3">
+            <a:schemeClr val="accent1"/>
+          </a:fillRef>
+          <a:effectRef idx="2">
+            <a:schemeClr val="accent1"/>
+          </a:effectRef>
+          <a:fontRef idx="minor">
+            <a:schemeClr val="lt1"/>
+          </a:fontRef>
+        </p:style>
+        <p:txBody>
+          <a:bodyPr rtlCol="0" anchor="ctr"/>
+          <a:lstStyle/>
+          <a:p>
+            <a:pPr algn="ctr"/>
+          </a:p>
+        </p:txBody>
+      </p:sp>
+      <p:sp>
+        <p:nvSpPr>
+          <p:cNvPr id="30" name="TextBox 29"/>
+          <p:cNvSpPr txBox="1"/>
+          <p:nvPr/>
+        </p:nvSpPr>
+        <p:spPr>
+          <a:xfrm>
+            <a:off x="8321040" y="3200400"/>
+            <a:ext cx="3017520" cy="365760"/>
+          </a:xfrm>
+          <a:prstGeom prst="rect">
+            <a:avLst/>
+          </a:prstGeom>
+          <a:noFill/>
+        </p:spPr>
+        <p:txBody>
+          <a:bodyPr wrap="square" anchor="ctr" lIns="0" rIns="0" tIns="0" bIns="0">
+            <a:spAutoFit/>
+          </a:bodyPr>
+          <a:lstStyle/>
+          <a:p>
+            <a:pPr algn="ctr">
+              <a:lnSpc>
+                <a:spcPct val="100000"/>
+              </a:lnSpc>
+            </a:pPr>
             <a:r>
               <a:rPr sz="950" b="1">
                 <a:solidFill>
@@ -8893,7 +10958,7 @@
       </p:sp>
       <p:sp>
         <p:nvSpPr>
-          <p:cNvPr id="18" name="Rounded Rectangle 17"/>
+          <p:cNvPr id="31" name="Rounded Rectangle 30"/>
           <p:cNvSpPr/>
           <p:nvPr/>
         </p:nvSpPr>
@@ -8939,7 +11004,7 @@
       </p:sp>
       <p:sp>
         <p:nvSpPr>
-          <p:cNvPr id="19" name="TextBox 18"/>
+          <p:cNvPr id="32" name="TextBox 31"/>
           <p:cNvSpPr txBox="1"/>
           <p:nvPr/>
         </p:nvSpPr>
@@ -9042,7 +11107,7 @@
       </p:sp>
       <p:cxnSp>
         <p:nvCxnSpPr>
-          <p:cNvPr id="20" name="Connector 19"/>
+          <p:cNvPr id="33" name="Connector 32"/>
           <p:cNvCxnSpPr/>
           <p:nvPr/>
         </p:nvCxnSpPr>
@@ -9078,7 +11143,7 @@
       </p:cxnSp>
       <p:sp>
         <p:nvSpPr>
-          <p:cNvPr id="21" name="Rounded Rectangle 20"/>
+          <p:cNvPr id="34" name="Rounded Rectangle 33"/>
           <p:cNvSpPr/>
           <p:nvPr/>
         </p:nvSpPr>
@@ -9124,14 +11189,270 @@
       </p:sp>
       <p:sp>
         <p:nvSpPr>
-          <p:cNvPr id="22" name="TextBox 21"/>
+          <p:cNvPr id="35" name="TextBox 34"/>
           <p:cNvSpPr txBox="1"/>
           <p:nvPr/>
         </p:nvSpPr>
         <p:spPr>
           <a:xfrm>
             <a:off x="2194560" y="4983479"/>
-            <a:ext cx="7498079" cy="1554480"/>
+            <a:ext cx="7498079" cy="274320"/>
+          </a:xfrm>
+          <a:prstGeom prst="rect">
+            <a:avLst/>
+          </a:prstGeom>
+          <a:noFill/>
+        </p:spPr>
+        <p:txBody>
+          <a:bodyPr wrap="square" anchor="t" lIns="0" rIns="0" tIns="0" bIns="0">
+            <a:spAutoFit/>
+          </a:bodyPr>
+          <a:lstStyle/>
+          <a:p>
+            <a:pPr algn="l">
+              <a:lnSpc>
+                <a:spcPct val="100000"/>
+              </a:lnSpc>
+            </a:pPr>
+            <a:r>
+              <a:rPr sz="1050" b="1">
+                <a:solidFill>
+                  <a:srgbClr val="202020"/>
+                </a:solidFill>
+                <a:latin typeface="Microsoft JhengHei"/>
+              </a:rPr>
+              <a:t>重要記憶事件範例:</a:t>
+            </a:r>
+          </a:p>
+        </p:txBody>
+      </p:sp>
+      <p:sp>
+        <p:nvSpPr>
+          <p:cNvPr id="36" name="Rectangle 35"/>
+          <p:cNvSpPr/>
+          <p:nvPr/>
+        </p:nvSpPr>
+        <p:spPr>
+          <a:xfrm>
+            <a:off x="2194560" y="5394959"/>
+            <a:ext cx="457200" cy="340156"/>
+          </a:xfrm>
+          <a:prstGeom prst="rect">
+            <a:avLst/>
+          </a:prstGeom>
+          <a:solidFill>
+            <a:srgbClr val="FFFFFF"/>
+          </a:solidFill>
+          <a:ln w="13970">
+            <a:solidFill>
+              <a:srgbClr val="707070"/>
+            </a:solidFill>
+          </a:ln>
+          <a:effectLst/>
+        </p:spPr>
+        <p:style>
+          <a:lnRef idx="1">
+            <a:schemeClr val="accent1"/>
+          </a:lnRef>
+          <a:fillRef idx="3">
+            <a:schemeClr val="accent1"/>
+          </a:fillRef>
+          <a:effectRef idx="2">
+            <a:schemeClr val="accent1"/>
+          </a:effectRef>
+          <a:fontRef idx="minor">
+            <a:schemeClr val="lt1"/>
+          </a:fontRef>
+        </p:style>
+        <p:txBody>
+          <a:bodyPr rtlCol="0" anchor="ctr"/>
+          <a:lstStyle/>
+          <a:p>
+            <a:pPr algn="ctr"/>
+          </a:p>
+        </p:txBody>
+      </p:sp>
+      <p:sp>
+        <p:nvSpPr>
+          <p:cNvPr id="37" name="Rectangle 36"/>
+          <p:cNvSpPr/>
+          <p:nvPr/>
+        </p:nvSpPr>
+        <p:spPr>
+          <a:xfrm>
+            <a:off x="2377440" y="5735116"/>
+            <a:ext cx="91440" cy="65836"/>
+          </a:xfrm>
+          <a:prstGeom prst="rect">
+            <a:avLst/>
+          </a:prstGeom>
+          <a:solidFill>
+            <a:srgbClr val="909090"/>
+          </a:solidFill>
+          <a:ln>
+            <a:noFill/>
+          </a:ln>
+          <a:effectLst/>
+        </p:spPr>
+        <p:style>
+          <a:lnRef idx="1">
+            <a:schemeClr val="accent1"/>
+          </a:lnRef>
+          <a:fillRef idx="3">
+            <a:schemeClr val="accent1"/>
+          </a:fillRef>
+          <a:effectRef idx="2">
+            <a:schemeClr val="accent1"/>
+          </a:effectRef>
+          <a:fontRef idx="minor">
+            <a:schemeClr val="lt1"/>
+          </a:fontRef>
+        </p:style>
+        <p:txBody>
+          <a:bodyPr rtlCol="0" anchor="ctr"/>
+          <a:lstStyle/>
+          <a:p>
+            <a:pPr algn="ctr"/>
+          </a:p>
+        </p:txBody>
+      </p:sp>
+      <p:sp>
+        <p:nvSpPr>
+          <p:cNvPr id="38" name="Rectangle 37"/>
+          <p:cNvSpPr/>
+          <p:nvPr/>
+        </p:nvSpPr>
+        <p:spPr>
+          <a:xfrm>
+            <a:off x="2295144" y="5811926"/>
+            <a:ext cx="256032" cy="43891"/>
+          </a:xfrm>
+          <a:prstGeom prst="rect">
+            <a:avLst/>
+          </a:prstGeom>
+          <a:solidFill>
+            <a:srgbClr val="909090"/>
+          </a:solidFill>
+          <a:ln>
+            <a:noFill/>
+          </a:ln>
+          <a:effectLst/>
+        </p:spPr>
+        <p:style>
+          <a:lnRef idx="1">
+            <a:schemeClr val="accent1"/>
+          </a:lnRef>
+          <a:fillRef idx="3">
+            <a:schemeClr val="accent1"/>
+          </a:fillRef>
+          <a:effectRef idx="2">
+            <a:schemeClr val="accent1"/>
+          </a:effectRef>
+          <a:fontRef idx="minor">
+            <a:schemeClr val="lt1"/>
+          </a:fontRef>
+        </p:style>
+        <p:txBody>
+          <a:bodyPr rtlCol="0" anchor="ctr"/>
+          <a:lstStyle/>
+          <a:p>
+            <a:pPr algn="ctr"/>
+          </a:p>
+        </p:txBody>
+      </p:sp>
+      <p:sp>
+        <p:nvSpPr>
+          <p:cNvPr id="39" name="Oval 38"/>
+          <p:cNvSpPr/>
+          <p:nvPr/>
+        </p:nvSpPr>
+        <p:spPr>
+          <a:xfrm>
+            <a:off x="2446568" y="5529925"/>
+            <a:ext cx="241401" cy="241401"/>
+          </a:xfrm>
+          <a:prstGeom prst="ellipse">
+            <a:avLst/>
+          </a:prstGeom>
+          <a:solidFill>
+            <a:srgbClr val="D9A52C"/>
+          </a:solidFill>
+          <a:ln>
+            <a:noFill/>
+          </a:ln>
+          <a:effectLst/>
+        </p:spPr>
+        <p:style>
+          <a:lnRef idx="1">
+            <a:schemeClr val="accent1"/>
+          </a:lnRef>
+          <a:fillRef idx="3">
+            <a:schemeClr val="accent1"/>
+          </a:fillRef>
+          <a:effectRef idx="2">
+            <a:schemeClr val="accent1"/>
+          </a:effectRef>
+          <a:fontRef idx="minor">
+            <a:schemeClr val="lt1"/>
+          </a:fontRef>
+        </p:style>
+        <p:txBody>
+          <a:bodyPr rtlCol="0" anchor="ctr"/>
+          <a:lstStyle/>
+          <a:p>
+            <a:pPr algn="ctr"/>
+          </a:p>
+        </p:txBody>
+      </p:sp>
+      <p:sp>
+        <p:nvSpPr>
+          <p:cNvPr id="40" name="TextBox 39"/>
+          <p:cNvSpPr txBox="1"/>
+          <p:nvPr/>
+        </p:nvSpPr>
+        <p:spPr>
+          <a:xfrm>
+            <a:off x="2446568" y="5525097"/>
+            <a:ext cx="241401" cy="241401"/>
+          </a:xfrm>
+          <a:prstGeom prst="rect">
+            <a:avLst/>
+          </a:prstGeom>
+          <a:noFill/>
+        </p:spPr>
+        <p:txBody>
+          <a:bodyPr wrap="square" anchor="ctr" lIns="0" rIns="0" tIns="0" bIns="0">
+            <a:spAutoFit/>
+          </a:bodyPr>
+          <a:lstStyle/>
+          <a:p>
+            <a:pPr algn="ctr">
+              <a:lnSpc>
+                <a:spcPct val="100000"/>
+              </a:lnSpc>
+            </a:pPr>
+            <a:r>
+              <a:rPr sz="900" b="1">
+                <a:solidFill>
+                  <a:srgbClr val="FFFFFF"/>
+                </a:solidFill>
+                <a:latin typeface="Microsoft JhengHei"/>
+              </a:rPr>
+              <a:t>$</a:t>
+            </a:r>
+          </a:p>
+        </p:txBody>
+      </p:sp>
+      <p:sp>
+        <p:nvSpPr>
+          <p:cNvPr id="41" name="TextBox 40"/>
+          <p:cNvSpPr txBox="1"/>
+          <p:nvPr/>
+        </p:nvSpPr>
+        <p:spPr>
+          <a:xfrm>
+            <a:off x="2880360" y="5303520"/>
+            <a:ext cx="6812280" cy="1234440"/>
           </a:xfrm>
           <a:prstGeom prst="rect">
             <a:avLst/>
@@ -9150,13 +11471,22 @@
               </a:lnSpc>
             </a:pPr>
             <a:r>
-              <a:rPr sz="1050" b="1">
+              <a:rPr sz="850" b="1">
+                <a:solidFill>
+                  <a:srgbClr val="3060C0"/>
+                </a:solidFill>
+                <a:latin typeface="Microsoft JhengHei"/>
+              </a:rPr>
+              <a:t>- (ID: 3357) </a:t>
+            </a:r>
+            <a:r>
+              <a:rPr sz="850" b="0">
                 <a:solidFill>
                   <a:srgbClr val="202020"/>
                 </a:solidFill>
                 <a:latin typeface="Microsoft JhengHei"/>
               </a:rPr>
-              <a:t>重要記憶事件範例:</a:t>
+              <a:t>Tesla 兩個月內市值蒸發 5000 億美元被視為買進機會:分析師看好上看 100% 的漲幅,Tesla 股價正經歷低潮,引發散戶投資人的焦慮……</a:t>
             </a:r>
           </a:p>
           <a:p>
@@ -9172,7 +11502,7 @@
                 </a:solidFill>
                 <a:latin typeface="Microsoft JhengHei"/>
               </a:rPr>
-              <a:t>- (ID: 3357) </a:t>
+              <a:t>- (ID: 3404) </a:t>
             </a:r>
             <a:r>
               <a:rPr sz="850" b="0">
@@ -9181,7 +11511,7 @@
                 </a:solidFill>
                 <a:latin typeface="Microsoft JhengHei"/>
               </a:rPr>
-              <a:t>Tesla 兩個月內市值蒸發 5000 億美元被視為買進機會:分析師看好上看 100% 的漲幅,Tesla 股價正經歷低潮,引發散戶投資人的焦慮……</a:t>
+              <a:t>Tesla 向美國買家提供折扣:如何用更便宜的價格入手 Model 3 或 Model Y,若趕在新年前購車,價格可能更划算……</a:t>
             </a:r>
           </a:p>
           <a:p>
@@ -9197,7 +11527,7 @@
                 </a:solidFill>
                 <a:latin typeface="Microsoft JhengHei"/>
               </a:rPr>
-              <a:t>- (ID: 3404) </a:t>
+              <a:t>- (ID: 3417) </a:t>
             </a:r>
             <a:r>
               <a:rPr sz="850" b="0">
@@ -9206,7 +11536,7 @@
                 </a:solidFill>
                 <a:latin typeface="Microsoft JhengHei"/>
               </a:rPr>
-              <a:t>Tesla 向美國買家提供折扣:如何用更便宜的價格入手 Model 3 或 Model Y,若趕在新年前購車,價格可能更划算……</a:t>
+              <a:t>Elon Musk 喊出「史詩級」Q4 目標恐生變:傳 Tesla 12 月將中國產 Model Y 產能縮減 20%……</a:t>
             </a:r>
           </a:p>
           <a:p>
@@ -9222,31 +11552,6 @@
                 </a:solidFill>
                 <a:latin typeface="Microsoft JhengHei"/>
               </a:rPr>
-              <a:t>- (ID: 3417) </a:t>
-            </a:r>
-            <a:r>
-              <a:rPr sz="850" b="0">
-                <a:solidFill>
-                  <a:srgbClr val="202020"/>
-                </a:solidFill>
-                <a:latin typeface="Microsoft JhengHei"/>
-              </a:rPr>
-              <a:t>Elon Musk 喊出「史詩級」Q4 目標恐生變:傳 Tesla 12 月將中國產 Model Y 產能縮減 20%……</a:t>
-            </a:r>
-          </a:p>
-          <a:p>
-            <a:pPr algn="l">
-              <a:lnSpc>
-                <a:spcPct val="115000"/>
-              </a:lnSpc>
-            </a:pPr>
-            <a:r>
-              <a:rPr sz="850" b="1">
-                <a:solidFill>
-                  <a:srgbClr val="3060C0"/>
-                </a:solidFill>
-                <a:latin typeface="Microsoft JhengHei"/>
-              </a:rPr>
               <a:t>- (ID: 1) </a:t>
             </a:r>
             <a:r>
@@ -9263,7 +11568,7 @@
       </p:sp>
       <p:cxnSp>
         <p:nvCxnSpPr>
-          <p:cNvPr id="23" name="Connector 22"/>
+          <p:cNvPr id="42" name="Connector 41"/>
           <p:cNvCxnSpPr/>
           <p:nvPr/>
         </p:nvCxnSpPr>
@@ -9299,7 +11604,7 @@
       </p:cxnSp>
       <p:sp>
         <p:nvSpPr>
-          <p:cNvPr id="24" name="Rounded Rectangle 23"/>
+          <p:cNvPr id="43" name="Rounded Rectangle 42"/>
           <p:cNvSpPr/>
           <p:nvPr/>
         </p:nvSpPr>
@@ -9346,7 +11651,7 @@
       </p:sp>
       <p:sp>
         <p:nvSpPr>
-          <p:cNvPr id="25" name="TextBox 24"/>
+          <p:cNvPr id="44" name="TextBox 43"/>
           <p:cNvSpPr txBox="1"/>
           <p:nvPr/>
         </p:nvSpPr>
@@ -9385,7 +11690,7 @@
       </p:sp>
       <p:sp>
         <p:nvSpPr>
-          <p:cNvPr id="26" name="Rounded Rectangle 25"/>
+          <p:cNvPr id="45" name="Rounded Rectangle 44"/>
           <p:cNvSpPr/>
           <p:nvPr/>
         </p:nvSpPr>
@@ -9440,7 +11745,7 @@
       </p:sp>
       <p:sp>
         <p:nvSpPr>
-          <p:cNvPr id="27" name="Rounded Rectangle 26"/>
+          <p:cNvPr id="46" name="Rounded Rectangle 45"/>
           <p:cNvSpPr/>
           <p:nvPr/>
         </p:nvSpPr>
@@ -9486,7 +11791,7 @@
       </p:sp>
       <p:sp>
         <p:nvSpPr>
-          <p:cNvPr id="28" name="TextBox 27"/>
+          <p:cNvPr id="47" name="TextBox 46"/>
           <p:cNvSpPr txBox="1"/>
           <p:nvPr/>
         </p:nvSpPr>
@@ -9550,7 +11855,7 @@
       </p:sp>
       <p:sp>
         <p:nvSpPr>
-          <p:cNvPr id="29" name="Rounded Rectangle 28"/>
+          <p:cNvPr id="48" name="Rounded Rectangle 47"/>
           <p:cNvSpPr/>
           <p:nvPr/>
         </p:nvSpPr>
@@ -9605,7 +11910,7 @@
       </p:sp>
       <p:sp>
         <p:nvSpPr>
-          <p:cNvPr id="30" name="Rounded Rectangle 29"/>
+          <p:cNvPr id="49" name="Rounded Rectangle 48"/>
           <p:cNvSpPr/>
           <p:nvPr/>
         </p:nvSpPr>
@@ -9651,7 +11956,7 @@
       </p:sp>
       <p:sp>
         <p:nvSpPr>
-          <p:cNvPr id="31" name="TextBox 30"/>
+          <p:cNvPr id="50" name="TextBox 49"/>
           <p:cNvSpPr txBox="1"/>
           <p:nvPr/>
         </p:nvSpPr>
@@ -9715,7 +12020,7 @@
       </p:sp>
       <p:sp>
         <p:nvSpPr>
-          <p:cNvPr id="32" name="Rounded Rectangle 31"/>
+          <p:cNvPr id="51" name="Rounded Rectangle 50"/>
           <p:cNvSpPr/>
           <p:nvPr/>
         </p:nvSpPr>
@@ -9770,7 +12075,7 @@
       </p:sp>
       <p:sp>
         <p:nvSpPr>
-          <p:cNvPr id="33" name="Rounded Rectangle 32"/>
+          <p:cNvPr id="52" name="Rounded Rectangle 51"/>
           <p:cNvSpPr/>
           <p:nvPr/>
         </p:nvSpPr>
@@ -9816,7 +12121,7 @@
       </p:sp>
       <p:sp>
         <p:nvSpPr>
-          <p:cNvPr id="34" name="TextBox 33"/>
+          <p:cNvPr id="53" name="TextBox 52"/>
           <p:cNvSpPr txBox="1"/>
           <p:nvPr/>
         </p:nvSpPr>
